--- a/docs/deepan-hospital-explained.pptx
+++ b/docs/deepan-hospital-explained.pptx
@@ -17,9 +17,11 @@
     <p:sldId id="265" r:id="rId11"/>
     <p:sldId id="266" r:id="rId12"/>
     <p:sldId id="267" r:id="rId13"/>
+    <p:sldId id="268" r:id="rId14"/>
+    <p:sldId id="269" r:id="rId15"/>
   </p:sldIdLst>
   <p:notesMasterIdLst>
-    <p:notesMasterId r:id="rId14"/>
+    <p:notesMasterId r:id="rId16"/>
   </p:notesMasterIdLst>
   <p:sldSz cx="12192000" cy="6858000"/>
   <p:notesSz cx="6858000" cy="12192000"/>
@@ -601,7 +603,7 @@
           <a:p>
             <a:r>
               <a:rPr lang="en-US" dirty="0"/>
-              <a:t>Be honest about the right column. It is what makes the left column believable.</a:t>
+              <a:t>If he asks "is this safe" — this is the slide.</a:t>
             </a:r>
             <a:endParaRPr lang="en-US" dirty="0"/>
           </a:p>
@@ -689,7 +691,7 @@
           <a:p>
             <a:r>
               <a:rPr lang="en-US" dirty="0"/>
-              <a:t>Phase two is a separate paid piece of work. Say so plainly.</a:t>
+              <a:t>This is the slide that earns trust with a doctor. Restraint, not features.</a:t>
             </a:r>
             <a:endParaRPr lang="en-US" dirty="0"/>
           </a:p>
@@ -777,7 +779,7 @@
           <a:p>
             <a:r>
               <a:rPr lang="en-US" dirty="0"/>
-              <a:t>Close here. Ask for the two things only the hospital can give: the registration numbers, and a decision on hosting.</a:t>
+              <a:t>Be honest about the right column. It is what makes the left column believable.</a:t>
             </a:r>
             <a:endParaRPr lang="en-US" dirty="0"/>
           </a:p>
@@ -801,6 +803,182 @@
             <a:fld id="{F7021451-1387-4CA6-816F-3879F97B5CBC}" type="slidenum">
               <a:rPr lang="en-US"/>
               <a:t>12</a:t>
+            </a:fld>
+            <a:endParaRPr lang="en-US"/>
+          </a:p>
+        </p:txBody>
+      </p:sp>
+    </p:spTree>
+    <p:extLst>
+      <p:ext uri="{BB962C8B-B14F-4D97-AF65-F5344CB8AC3E}">
+        <p14:creationId xmlns:p14="http://schemas.microsoft.com/office/powerpoint/2010/main" val="1024086991"/>
+      </p:ext>
+    </p:extLst>
+  </p:cSld>
+  <p:clrMapOvr>
+    <a:masterClrMapping/>
+  </p:clrMapOvr>
+</p:notes>
+</file>
+
+<file path=ppt/notesSlides/notesSlide13.xml><?xml version="1.0" encoding="utf-8"?>
+<p:notes xmlns:a="http://schemas.openxmlformats.org/drawingml/2006/main" xmlns:r="http://schemas.openxmlformats.org/officeDocument/2006/relationships" xmlns:p="http://schemas.openxmlformats.org/presentationml/2006/main">
+  <p:cSld>
+    <p:spTree>
+      <p:nvGrpSpPr>
+        <p:cNvPr id="1" name=""/>
+        <p:cNvGrpSpPr/>
+        <p:nvPr/>
+      </p:nvGrpSpPr>
+      <p:grpSpPr>
+        <a:xfrm>
+          <a:off x="0" y="0"/>
+          <a:ext cx="0" cy="0"/>
+          <a:chOff x="0" y="0"/>
+          <a:chExt cx="0" cy="0"/>
+        </a:xfrm>
+      </p:grpSpPr>
+      <p:sp>
+        <p:nvSpPr>
+          <p:cNvPr id="2" name="Slide Image Placeholder 1"/>
+          <p:cNvSpPr>
+            <a:spLocks noGrp="1" noRot="1" noChangeAspect="1"/>
+          </p:cNvSpPr>
+          <p:nvPr>
+            <p:ph type="sldImg"/>
+          </p:nvPr>
+        </p:nvSpPr>
+        <p:spPr/>
+      </p:sp>
+      <p:sp>
+        <p:nvSpPr>
+          <p:cNvPr id="3" name="Notes Placeholder 2"/>
+          <p:cNvSpPr>
+            <a:spLocks noGrp="1"/>
+          </p:cNvSpPr>
+          <p:nvPr>
+            <p:ph type="body" idx="1"/>
+          </p:nvPr>
+        </p:nvSpPr>
+        <p:spPr/>
+        <p:txBody>
+          <a:bodyPr/>
+          <a:lstStyle/>
+          <a:p>
+            <a:r>
+              <a:rPr lang="en-US" dirty="0"/>
+              <a:t>Phase two is a separate paid piece of work. Say so plainly.</a:t>
+            </a:r>
+            <a:endParaRPr lang="en-US" dirty="0"/>
+          </a:p>
+        </p:txBody>
+      </p:sp>
+      <p:sp>
+        <p:nvSpPr>
+          <p:cNvPr id="4" name="Slide Number Placeholder 3"/>
+          <p:cNvSpPr>
+            <a:spLocks noGrp="1"/>
+          </p:cNvSpPr>
+          <p:nvPr>
+            <p:ph type="sldNum" sz="quarter" idx="10"/>
+          </p:nvPr>
+        </p:nvSpPr>
+        <p:spPr/>
+        <p:txBody>
+          <a:bodyPr/>
+          <a:lstStyle/>
+          <a:p>
+            <a:fld id="{F7021451-1387-4CA6-816F-3879F97B5CBC}" type="slidenum">
+              <a:rPr lang="en-US"/>
+              <a:t>13</a:t>
+            </a:fld>
+            <a:endParaRPr lang="en-US"/>
+          </a:p>
+        </p:txBody>
+      </p:sp>
+    </p:spTree>
+    <p:extLst>
+      <p:ext uri="{BB962C8B-B14F-4D97-AF65-F5344CB8AC3E}">
+        <p14:creationId xmlns:p14="http://schemas.microsoft.com/office/powerpoint/2010/main" val="1024086991"/>
+      </p:ext>
+    </p:extLst>
+  </p:cSld>
+  <p:clrMapOvr>
+    <a:masterClrMapping/>
+  </p:clrMapOvr>
+</p:notes>
+</file>
+
+<file path=ppt/notesSlides/notesSlide14.xml><?xml version="1.0" encoding="utf-8"?>
+<p:notes xmlns:a="http://schemas.openxmlformats.org/drawingml/2006/main" xmlns:r="http://schemas.openxmlformats.org/officeDocument/2006/relationships" xmlns:p="http://schemas.openxmlformats.org/presentationml/2006/main">
+  <p:cSld>
+    <p:spTree>
+      <p:nvGrpSpPr>
+        <p:cNvPr id="1" name=""/>
+        <p:cNvGrpSpPr/>
+        <p:nvPr/>
+      </p:nvGrpSpPr>
+      <p:grpSpPr>
+        <a:xfrm>
+          <a:off x="0" y="0"/>
+          <a:ext cx="0" cy="0"/>
+          <a:chOff x="0" y="0"/>
+          <a:chExt cx="0" cy="0"/>
+        </a:xfrm>
+      </p:grpSpPr>
+      <p:sp>
+        <p:nvSpPr>
+          <p:cNvPr id="2" name="Slide Image Placeholder 1"/>
+          <p:cNvSpPr>
+            <a:spLocks noGrp="1" noRot="1" noChangeAspect="1"/>
+          </p:cNvSpPr>
+          <p:nvPr>
+            <p:ph type="sldImg"/>
+          </p:nvPr>
+        </p:nvSpPr>
+        <p:spPr/>
+      </p:sp>
+      <p:sp>
+        <p:nvSpPr>
+          <p:cNvPr id="3" name="Notes Placeholder 2"/>
+          <p:cNvSpPr>
+            <a:spLocks noGrp="1"/>
+          </p:cNvSpPr>
+          <p:nvPr>
+            <p:ph type="body" idx="1"/>
+          </p:nvPr>
+        </p:nvSpPr>
+        <p:spPr/>
+        <p:txBody>
+          <a:bodyPr/>
+          <a:lstStyle/>
+          <a:p>
+            <a:r>
+              <a:rPr lang="en-US" dirty="0"/>
+              <a:t>Close here. Ask for the two things only the hospital can give: the registration numbers, and a decision on hosting.</a:t>
+            </a:r>
+            <a:endParaRPr lang="en-US" dirty="0"/>
+          </a:p>
+        </p:txBody>
+      </p:sp>
+      <p:sp>
+        <p:nvSpPr>
+          <p:cNvPr id="4" name="Slide Number Placeholder 3"/>
+          <p:cNvSpPr>
+            <a:spLocks noGrp="1"/>
+          </p:cNvSpPr>
+          <p:nvPr>
+            <p:ph type="sldNum" sz="quarter" idx="10"/>
+          </p:nvPr>
+        </p:nvSpPr>
+        <p:spPr/>
+        <p:txBody>
+          <a:bodyPr/>
+          <a:lstStyle/>
+          <a:p>
+            <a:fld id="{F7021451-1387-4CA6-816F-3879F97B5CBC}" type="slidenum">
+              <a:rPr lang="en-US"/>
+              <a:t>14</a:t>
             </a:fld>
             <a:endParaRPr lang="en-US"/>
           </a:p>
@@ -1305,7 +1483,7 @@
           <a:p>
             <a:r>
               <a:rPr lang="en-US" dirty="0"/>
-              <a:t>The last line matters to an owner: no per-doctor licence, ever.</a:t>
+              <a:t>Walk through this slowly. It is the slide that makes the previous one make sense.</a:t>
             </a:r>
             <a:endParaRPr lang="en-US" dirty="0"/>
           </a:p>
@@ -1393,7 +1571,7 @@
           <a:p>
             <a:r>
               <a:rPr lang="en-US" dirty="0"/>
-              <a:t>If he asks "is this safe" — this is the slide.</a:t>
+              <a:t>The last line matters to an owner: no per-doctor licence, ever.</a:t>
             </a:r>
             <a:endParaRPr lang="en-US" dirty="0"/>
           </a:p>
@@ -1481,7 +1659,7 @@
           <a:p>
             <a:r>
               <a:rPr lang="en-US" dirty="0"/>
-              <a:t>This is the slide that earns trust with a doctor. Restraint, not features.</a:t>
+              <a:t>If he asks "so where is it?" — the program is finished, it needs somewhere to live, and that costs about a phone bill. Not "it is not built yet".</a:t>
             </a:r>
             <a:endParaRPr lang="en-US" dirty="0"/>
           </a:p>
@@ -2293,7 +2471,7 @@
                 <a:ea typeface="Calibri" pitchFamily="34" charset="-122"/>
                 <a:cs typeface="Calibri" pitchFamily="34" charset="-120"/>
               </a:rPr>
-              <a:t>WHERE IT STANDS</a:t>
+              <a:t>THE DATA</a:t>
             </a:r>
             <a:endParaRPr lang="en-US" sz="1100" dirty="0"/>
           </a:p>
@@ -2332,7 +2510,7 @@
                 <a:ea typeface="Cambria" pitchFamily="34" charset="-122"/>
                 <a:cs typeface="Cambria" pitchFamily="34" charset="-120"/>
               </a:rPr>
-              <a:t>What is finished and what is not</a:t>
+              <a:t>Where the records live, and who can reach them</a:t>
             </a:r>
             <a:endParaRPr lang="en-US" sz="3400" dirty="0"/>
           </a:p>
@@ -2347,15 +2525,15 @@
         <p:spPr>
           <a:xfrm>
             <a:off x="685800" y="1737360"/>
-            <a:ext cx="5257800" cy="3566160"/>
+            <a:ext cx="5257800" cy="1783080"/>
           </a:xfrm>
           <a:prstGeom prst="roundRect">
             <a:avLst>
-              <a:gd name="adj" fmla="val 2051"/>
+              <a:gd name="adj" fmla="val 4103"/>
             </a:avLst>
           </a:prstGeom>
           <a:solidFill>
-            <a:srgbClr val="EEF6F4"/>
+            <a:srgbClr val="F4F2EC"/>
           </a:solidFill>
           <a:ln w="12700">
             <a:solidFill>
@@ -2374,33 +2552,33 @@
         <p:spPr>
           <a:xfrm>
             <a:off x="1005840" y="1965960"/>
-            <a:ext cx="4617720" cy="411480"/>
-          </a:xfrm>
-          <a:prstGeom prst="rect">
-            <a:avLst/>
-          </a:prstGeom>
-          <a:noFill/>
-          <a:ln/>
-        </p:spPr>
-        <p:txBody>
-          <a:bodyPr wrap="square" lIns="0" tIns="0" rIns="0" bIns="0" rtlCol="0" anchor="ctr"/>
-          <a:lstStyle/>
-          <a:p>
-            <a:pPr indent="0" marL="0">
-              <a:buNone/>
-            </a:pPr>
-            <a:r>
-              <a:rPr lang="en-US" sz="2200" b="1" dirty="0">
-                <a:solidFill>
-                  <a:srgbClr val="0E6A5C"/>
+            <a:ext cx="4617720" cy="365760"/>
+          </a:xfrm>
+          <a:prstGeom prst="rect">
+            <a:avLst/>
+          </a:prstGeom>
+          <a:noFill/>
+          <a:ln/>
+        </p:spPr>
+        <p:txBody>
+          <a:bodyPr wrap="square" lIns="0" tIns="0" rIns="0" bIns="0" rtlCol="0" anchor="ctr"/>
+          <a:lstStyle/>
+          <a:p>
+            <a:pPr indent="0" marL="0">
+              <a:buNone/>
+            </a:pPr>
+            <a:r>
+              <a:rPr lang="en-US" sz="1800" b="1" dirty="0">
+                <a:solidFill>
+                  <a:srgbClr val="16130F"/>
                 </a:solidFill>
                 <a:latin typeface="Cambria" pitchFamily="34" charset="0"/>
                 <a:ea typeface="Cambria" pitchFamily="34" charset="-122"/>
                 <a:cs typeface="Cambria" pitchFamily="34" charset="-120"/>
               </a:rPr>
-              <a:t>Built and tested</a:t>
-            </a:r>
-            <a:endParaRPr lang="en-US" sz="2200" dirty="0"/>
+              <a:t>Inside India</a:t>
+            </a:r>
+            <a:endParaRPr lang="en-US" sz="1800" dirty="0"/>
           </a:p>
         </p:txBody>
       </p:sp>
@@ -2412,28 +2590,27 @@
         </p:nvSpPr>
         <p:spPr>
           <a:xfrm>
-            <a:off x="1005840" y="2514600"/>
-            <a:ext cx="4617720" cy="2651760"/>
-          </a:xfrm>
-          <a:prstGeom prst="rect">
-            <a:avLst/>
-          </a:prstGeom>
-          <a:noFill/>
-          <a:ln/>
-        </p:spPr>
-        <p:txBody>
-          <a:bodyPr wrap="square" lIns="0" tIns="0" rIns="0" bIns="0" rtlCol="0" anchor="ctr"/>
-          <a:lstStyle/>
-          <a:p>
-            <a:pPr marL="342900" indent="-342900">
-              <a:spcAft>
-                <a:spcPts val="900"/>
-              </a:spcAft>
-              <a:buSzPct val="100000"/>
-              <a:buChar char="•"/>
-            </a:pPr>
-            <a:r>
-              <a:rPr lang="en-US" sz="1400" dirty="0">
+            <a:off x="1005840" y="2395728"/>
+            <a:ext cx="4617720" cy="1005840"/>
+          </a:xfrm>
+          <a:prstGeom prst="rect">
+            <a:avLst/>
+          </a:prstGeom>
+          <a:noFill/>
+          <a:ln/>
+        </p:spPr>
+        <p:txBody>
+          <a:bodyPr wrap="square" lIns="0" tIns="0" rIns="0" bIns="0" rtlCol="0" anchor="ctr"/>
+          <a:lstStyle/>
+          <a:p>
+            <a:pPr indent="0" marL="0">
+              <a:lnSpc>
+                <a:spcPts val="2000"/>
+              </a:lnSpc>
+              <a:buNone/>
+            </a:pPr>
+            <a:r>
+              <a:rPr lang="en-US" sz="1300" dirty="0">
                 <a:solidFill>
                   <a:srgbClr val="403B33"/>
                 </a:solidFill>
@@ -2441,93 +2618,9 @@
                 <a:ea typeface="Calibri" pitchFamily="34" charset="-122"/>
                 <a:cs typeface="Calibri" pitchFamily="34" charset="-120"/>
               </a:rPr>
-              <a:t>Patient booking, three languages</a:t>
-            </a:r>
-            <a:endParaRPr lang="en-US" sz="1400" dirty="0"/>
-          </a:p>
-          <a:p>
-            <a:pPr marL="342900" indent="-342900">
-              <a:spcAft>
-                <a:spcPts val="900"/>
-              </a:spcAft>
-              <a:buSzPct val="100000"/>
-              <a:buChar char="•"/>
-            </a:pPr>
-            <a:r>
-              <a:rPr lang="en-US" sz="1400" dirty="0">
-                <a:solidFill>
-                  <a:srgbClr val="403B33"/>
-                </a:solidFill>
-                <a:latin typeface="Calibri" pitchFamily="34" charset="0"/>
-                <a:ea typeface="Calibri" pitchFamily="34" charset="-122"/>
-                <a:cs typeface="Calibri" pitchFamily="34" charset="-120"/>
-              </a:rPr>
-              <a:t>The reception desk</a:t>
-            </a:r>
-            <a:endParaRPr lang="en-US" sz="1400" dirty="0"/>
-          </a:p>
-          <a:p>
-            <a:pPr marL="342900" indent="-342900">
-              <a:spcAft>
-                <a:spcPts val="900"/>
-              </a:spcAft>
-              <a:buSzPct val="100000"/>
-              <a:buChar char="•"/>
-            </a:pPr>
-            <a:r>
-              <a:rPr lang="en-US" sz="1400" dirty="0">
-                <a:solidFill>
-                  <a:srgbClr val="403B33"/>
-                </a:solidFill>
-                <a:latin typeface="Calibri" pitchFamily="34" charset="0"/>
-                <a:ea typeface="Calibri" pitchFamily="34" charset="-122"/>
-                <a:cs typeface="Calibri" pitchFamily="34" charset="-120"/>
-              </a:rPr>
-              <a:t>Written confirmation to patients</a:t>
-            </a:r>
-            <a:endParaRPr lang="en-US" sz="1400" dirty="0"/>
-          </a:p>
-          <a:p>
-            <a:pPr marL="342900" indent="-342900">
-              <a:spcAft>
-                <a:spcPts val="900"/>
-              </a:spcAft>
-              <a:buSzPct val="100000"/>
-              <a:buChar char="•"/>
-            </a:pPr>
-            <a:r>
-              <a:rPr lang="en-US" sz="1400" dirty="0">
-                <a:solidFill>
-                  <a:srgbClr val="403B33"/>
-                </a:solidFill>
-                <a:latin typeface="Calibri" pitchFamily="34" charset="0"/>
-                <a:ea typeface="Calibri" pitchFamily="34" charset="-122"/>
-                <a:cs typeface="Calibri" pitchFamily="34" charset="-120"/>
-              </a:rPr>
-              <a:t>The worklist for Klinique</a:t>
-            </a:r>
-            <a:endParaRPr lang="en-US" sz="1400" dirty="0"/>
-          </a:p>
-          <a:p>
-            <a:pPr marL="342900" indent="-342900">
-              <a:spcAft>
-                <a:spcPts val="900"/>
-              </a:spcAft>
-              <a:buSzPct val="100000"/>
-              <a:buChar char="•"/>
-            </a:pPr>
-            <a:r>
-              <a:rPr lang="en-US" sz="1400" dirty="0">
-                <a:solidFill>
-                  <a:srgbClr val="403B33"/>
-                </a:solidFill>
-                <a:latin typeface="Calibri" pitchFamily="34" charset="0"/>
-                <a:ea typeface="Calibri" pitchFamily="34" charset="-122"/>
-                <a:cs typeface="Calibri" pitchFamily="34" charset="-120"/>
-              </a:rPr>
-              <a:t>A printed manual for the staff</a:t>
-            </a:r>
-            <a:endParaRPr lang="en-US" sz="1400" dirty="0"/>
+              <a:t>The server should sit in Mumbai or Bangalore. It is Indian patients’ health data, governed by the DPDP Act 2023, and keeping it in the country avoids the whole question.</a:t>
+            </a:r>
+            <a:endParaRPr lang="en-US" sz="1300" dirty="0"/>
           </a:p>
         </p:txBody>
       </p:sp>
@@ -2540,15 +2633,15 @@
         <p:spPr>
           <a:xfrm>
             <a:off x="6217920" y="1737360"/>
-            <a:ext cx="5257800" cy="3566160"/>
+            <a:ext cx="5257800" cy="1783080"/>
           </a:xfrm>
           <a:prstGeom prst="roundRect">
             <a:avLst>
-              <a:gd name="adj" fmla="val 2051"/>
+              <a:gd name="adj" fmla="val 4103"/>
             </a:avLst>
           </a:prstGeom>
           <a:solidFill>
-            <a:srgbClr val="FDF6E7"/>
+            <a:srgbClr val="F4F2EC"/>
           </a:solidFill>
           <a:ln w="12700">
             <a:solidFill>
@@ -2567,33 +2660,33 @@
         <p:spPr>
           <a:xfrm>
             <a:off x="6537960" y="1965960"/>
-            <a:ext cx="4617720" cy="411480"/>
-          </a:xfrm>
-          <a:prstGeom prst="rect">
-            <a:avLst/>
-          </a:prstGeom>
-          <a:noFill/>
-          <a:ln/>
-        </p:spPr>
-        <p:txBody>
-          <a:bodyPr wrap="square" lIns="0" tIns="0" rIns="0" bIns="0" rtlCol="0" anchor="ctr"/>
-          <a:lstStyle/>
-          <a:p>
-            <a:pPr indent="0" marL="0">
-              <a:buNone/>
-            </a:pPr>
-            <a:r>
-              <a:rPr lang="en-US" sz="2200" b="1" dirty="0">
-                <a:solidFill>
-                  <a:srgbClr val="8A5A12"/>
+            <a:ext cx="4617720" cy="365760"/>
+          </a:xfrm>
+          <a:prstGeom prst="rect">
+            <a:avLst/>
+          </a:prstGeom>
+          <a:noFill/>
+          <a:ln/>
+        </p:spPr>
+        <p:txBody>
+          <a:bodyPr wrap="square" lIns="0" tIns="0" rIns="0" bIns="0" rtlCol="0" anchor="ctr"/>
+          <a:lstStyle/>
+          <a:p>
+            <a:pPr indent="0" marL="0">
+              <a:buNone/>
+            </a:pPr>
+            <a:r>
+              <a:rPr lang="en-US" sz="1800" b="1" dirty="0">
+                <a:solidFill>
+                  <a:srgbClr val="16130F"/>
                 </a:solidFill>
                 <a:latin typeface="Cambria" pitchFamily="34" charset="0"/>
                 <a:ea typeface="Cambria" pitchFamily="34" charset="-122"/>
                 <a:cs typeface="Cambria" pitchFamily="34" charset="-120"/>
               </a:rPr>
-              <a:t>Still needed</a:t>
-            </a:r>
-            <a:endParaRPr lang="en-US" sz="2200" dirty="0"/>
+              <a:t>In the hospital’s own account</a:t>
+            </a:r>
+            <a:endParaRPr lang="en-US" sz="1800" dirty="0"/>
           </a:p>
         </p:txBody>
       </p:sp>
@@ -2605,28 +2698,27 @@
         </p:nvSpPr>
         <p:spPr>
           <a:xfrm>
-            <a:off x="6537960" y="2514600"/>
-            <a:ext cx="4617720" cy="2651760"/>
-          </a:xfrm>
-          <a:prstGeom prst="rect">
-            <a:avLst/>
-          </a:prstGeom>
-          <a:noFill/>
-          <a:ln/>
-        </p:spPr>
-        <p:txBody>
-          <a:bodyPr wrap="square" lIns="0" tIns="0" rIns="0" bIns="0" rtlCol="0" anchor="ctr"/>
-          <a:lstStyle/>
-          <a:p>
-            <a:pPr marL="342900" indent="-342900">
-              <a:spcAft>
-                <a:spcPts val="900"/>
-              </a:spcAft>
-              <a:buSzPct val="100000"/>
-              <a:buChar char="•"/>
-            </a:pPr>
-            <a:r>
-              <a:rPr lang="en-US" sz="1400" dirty="0">
+            <a:off x="6537960" y="2395728"/>
+            <a:ext cx="4617720" cy="1005840"/>
+          </a:xfrm>
+          <a:prstGeom prst="rect">
+            <a:avLst/>
+          </a:prstGeom>
+          <a:noFill/>
+          <a:ln/>
+        </p:spPr>
+        <p:txBody>
+          <a:bodyPr wrap="square" lIns="0" tIns="0" rIns="0" bIns="0" rtlCol="0" anchor="ctr"/>
+          <a:lstStyle/>
+          <a:p>
+            <a:pPr indent="0" marL="0">
+              <a:lnSpc>
+                <a:spcPts val="2000"/>
+              </a:lnSpc>
+              <a:buNone/>
+            </a:pPr>
+            <a:r>
+              <a:rPr lang="en-US" sz="1300" dirty="0">
                 <a:solidFill>
                   <a:srgbClr val="403B33"/>
                 </a:solidFill>
@@ -2634,20 +2726,107 @@
                 <a:ea typeface="Calibri" pitchFamily="34" charset="-122"/>
                 <a:cs typeface="Calibri" pitchFamily="34" charset="-120"/>
               </a:rPr>
-              <a:t>A domain and hosting in India</a:t>
-            </a:r>
-            <a:endParaRPr lang="en-US" sz="1400" dirty="0"/>
-          </a:p>
-          <a:p>
-            <a:pPr marL="342900" indent="-342900">
-              <a:spcAft>
-                <a:spcPts val="900"/>
-              </a:spcAft>
-              <a:buSzPct val="100000"/>
-              <a:buChar char="•"/>
-            </a:pPr>
-            <a:r>
-              <a:rPr lang="en-US" sz="1400" dirty="0">
+              <a:t>The domain, the server and the backups registered to Deepan Hospital — not to me. A supplier holding a hospital’s patient data is a problem for both sides.</a:t>
+            </a:r>
+            <a:endParaRPr lang="en-US" sz="1300" dirty="0"/>
+          </a:p>
+        </p:txBody>
+      </p:sp>
+      <p:sp>
+        <p:nvSpPr>
+          <p:cNvPr id="10" name="Shape 8"/>
+          <p:cNvSpPr/>
+          <p:nvPr/>
+        </p:nvSpPr>
+        <p:spPr>
+          <a:xfrm>
+            <a:off x="685800" y="3794760"/>
+            <a:ext cx="5257800" cy="1783080"/>
+          </a:xfrm>
+          <a:prstGeom prst="roundRect">
+            <a:avLst>
+              <a:gd name="adj" fmla="val 4103"/>
+            </a:avLst>
+          </a:prstGeom>
+          <a:solidFill>
+            <a:srgbClr val="F4F2EC"/>
+          </a:solidFill>
+          <a:ln w="12700">
+            <a:solidFill>
+              <a:srgbClr val="E7E3D9"/>
+            </a:solidFill>
+            <a:prstDash val="solid"/>
+          </a:ln>
+        </p:spPr>
+      </p:sp>
+      <p:sp>
+        <p:nvSpPr>
+          <p:cNvPr id="11" name="Text 9"/>
+          <p:cNvSpPr/>
+          <p:nvPr/>
+        </p:nvSpPr>
+        <p:spPr>
+          <a:xfrm>
+            <a:off x="1005840" y="4023360"/>
+            <a:ext cx="4617720" cy="365760"/>
+          </a:xfrm>
+          <a:prstGeom prst="rect">
+            <a:avLst/>
+          </a:prstGeom>
+          <a:noFill/>
+          <a:ln/>
+        </p:spPr>
+        <p:txBody>
+          <a:bodyPr wrap="square" lIns="0" tIns="0" rIns="0" bIns="0" rtlCol="0" anchor="ctr"/>
+          <a:lstStyle/>
+          <a:p>
+            <a:pPr indent="0" marL="0">
+              <a:buNone/>
+            </a:pPr>
+            <a:r>
+              <a:rPr lang="en-US" sz="1800" b="1" dirty="0">
+                <a:solidFill>
+                  <a:srgbClr val="16130F"/>
+                </a:solidFill>
+                <a:latin typeface="Cambria" pitchFamily="34" charset="0"/>
+                <a:ea typeface="Cambria" pitchFamily="34" charset="-122"/>
+                <a:cs typeface="Cambria" pitchFamily="34" charset="-120"/>
+              </a:rPr>
+              <a:t>Copied off the machine</a:t>
+            </a:r>
+            <a:endParaRPr lang="en-US" sz="1800" dirty="0"/>
+          </a:p>
+        </p:txBody>
+      </p:sp>
+      <p:sp>
+        <p:nvSpPr>
+          <p:cNvPr id="12" name="Text 10"/>
+          <p:cNvSpPr/>
+          <p:nvPr/>
+        </p:nvSpPr>
+        <p:spPr>
+          <a:xfrm>
+            <a:off x="1005840" y="4453128"/>
+            <a:ext cx="4617720" cy="1005840"/>
+          </a:xfrm>
+          <a:prstGeom prst="rect">
+            <a:avLst/>
+          </a:prstGeom>
+          <a:noFill/>
+          <a:ln/>
+        </p:spPr>
+        <p:txBody>
+          <a:bodyPr wrap="square" lIns="0" tIns="0" rIns="0" bIns="0" rtlCol="0" anchor="ctr"/>
+          <a:lstStyle/>
+          <a:p>
+            <a:pPr indent="0" marL="0">
+              <a:lnSpc>
+                <a:spcPts val="2000"/>
+              </a:lnSpc>
+              <a:buNone/>
+            </a:pPr>
+            <a:r>
+              <a:rPr lang="en-US" sz="1300" dirty="0">
                 <a:solidFill>
                   <a:srgbClr val="403B33"/>
                 </a:solidFill>
@@ -2655,20 +2834,107 @@
                 <a:ea typeface="Calibri" pitchFamily="34" charset="-122"/>
                 <a:cs typeface="Calibri" pitchFamily="34" charset="-120"/>
               </a:rPr>
-              <a:t>Registration numbers for all 18 doctors</a:t>
-            </a:r>
-            <a:endParaRPr lang="en-US" sz="1400" dirty="0"/>
-          </a:p>
-          <a:p>
-            <a:pPr marL="342900" indent="-342900">
-              <a:spcAft>
-                <a:spcPts val="900"/>
-              </a:spcAft>
-              <a:buSzPct val="100000"/>
-              <a:buChar char="•"/>
-            </a:pPr>
-            <a:r>
-              <a:rPr lang="en-US" sz="1400" dirty="0">
+              <a:t>A backup is written every six hours. Those copies must also be pulled somewhere else — a backup on the same disk is no protection against that disk failing.</a:t>
+            </a:r>
+            <a:endParaRPr lang="en-US" sz="1300" dirty="0"/>
+          </a:p>
+        </p:txBody>
+      </p:sp>
+      <p:sp>
+        <p:nvSpPr>
+          <p:cNvPr id="13" name="Shape 11"/>
+          <p:cNvSpPr/>
+          <p:nvPr/>
+        </p:nvSpPr>
+        <p:spPr>
+          <a:xfrm>
+            <a:off x="6217920" y="3794760"/>
+            <a:ext cx="5257800" cy="1783080"/>
+          </a:xfrm>
+          <a:prstGeom prst="roundRect">
+            <a:avLst>
+              <a:gd name="adj" fmla="val 4103"/>
+            </a:avLst>
+          </a:prstGeom>
+          <a:solidFill>
+            <a:srgbClr val="F4F2EC"/>
+          </a:solidFill>
+          <a:ln w="12700">
+            <a:solidFill>
+              <a:srgbClr val="E7E3D9"/>
+            </a:solidFill>
+            <a:prstDash val="solid"/>
+          </a:ln>
+        </p:spPr>
+      </p:sp>
+      <p:sp>
+        <p:nvSpPr>
+          <p:cNvPr id="14" name="Text 12"/>
+          <p:cNvSpPr/>
+          <p:nvPr/>
+        </p:nvSpPr>
+        <p:spPr>
+          <a:xfrm>
+            <a:off x="6537960" y="4023360"/>
+            <a:ext cx="4617720" cy="365760"/>
+          </a:xfrm>
+          <a:prstGeom prst="rect">
+            <a:avLst/>
+          </a:prstGeom>
+          <a:noFill/>
+          <a:ln/>
+        </p:spPr>
+        <p:txBody>
+          <a:bodyPr wrap="square" lIns="0" tIns="0" rIns="0" bIns="0" rtlCol="0" anchor="ctr"/>
+          <a:lstStyle/>
+          <a:p>
+            <a:pPr indent="0" marL="0">
+              <a:buNone/>
+            </a:pPr>
+            <a:r>
+              <a:rPr lang="en-US" sz="1800" b="1" dirty="0">
+                <a:solidFill>
+                  <a:srgbClr val="16130F"/>
+                </a:solidFill>
+                <a:latin typeface="Cambria" pitchFamily="34" charset="0"/>
+                <a:ea typeface="Cambria" pitchFamily="34" charset="-122"/>
+                <a:cs typeface="Cambria" pitchFamily="34" charset="-120"/>
+              </a:rPr>
+              <a:t>Nothing at risk today</a:t>
+            </a:r>
+            <a:endParaRPr lang="en-US" sz="1800" dirty="0"/>
+          </a:p>
+        </p:txBody>
+      </p:sp>
+      <p:sp>
+        <p:nvSpPr>
+          <p:cNvPr id="15" name="Text 13"/>
+          <p:cNvSpPr/>
+          <p:nvPr/>
+        </p:nvSpPr>
+        <p:spPr>
+          <a:xfrm>
+            <a:off x="6537960" y="4453128"/>
+            <a:ext cx="4617720" cy="1005840"/>
+          </a:xfrm>
+          <a:prstGeom prst="rect">
+            <a:avLst/>
+          </a:prstGeom>
+          <a:noFill/>
+          <a:ln/>
+        </p:spPr>
+        <p:txBody>
+          <a:bodyPr wrap="square" lIns="0" tIns="0" rIns="0" bIns="0" rtlCol="0" anchor="ctr"/>
+          <a:lstStyle/>
+          <a:p>
+            <a:pPr indent="0" marL="0">
+              <a:lnSpc>
+                <a:spcPts val="2000"/>
+              </a:lnSpc>
+              <a:buNone/>
+            </a:pPr>
+            <a:r>
+              <a:rPr lang="en-US" sz="1300" dirty="0">
                 <a:solidFill>
                   <a:srgbClr val="403B33"/>
                 </a:solidFill>
@@ -2676,90 +2942,9 @@
                 <a:ea typeface="Calibri" pitchFamily="34" charset="-122"/>
                 <a:cs typeface="Calibri" pitchFamily="34" charset="-120"/>
               </a:rPr>
-              <a:t>Hours and fees confirmed by the hospital</a:t>
-            </a:r>
-            <a:endParaRPr lang="en-US" sz="1400" dirty="0"/>
-          </a:p>
-          <a:p>
-            <a:pPr marL="342900" indent="-342900">
-              <a:spcAft>
-                <a:spcPts val="900"/>
-              </a:spcAft>
-              <a:buSzPct val="100000"/>
-              <a:buChar char="•"/>
-            </a:pPr>
-            <a:r>
-              <a:rPr lang="en-US" sz="1400" dirty="0">
-                <a:solidFill>
-                  <a:srgbClr val="403B33"/>
-                </a:solidFill>
-                <a:latin typeface="Calibri" pitchFamily="34" charset="0"/>
-                <a:ea typeface="Calibri" pitchFamily="34" charset="-122"/>
-                <a:cs typeface="Calibri" pitchFamily="34" charset="-120"/>
-              </a:rPr>
-              <a:t>Automatic transfer into Klinique</a:t>
-            </a:r>
-            <a:endParaRPr lang="en-US" sz="1400" dirty="0"/>
-          </a:p>
-          <a:p>
-            <a:pPr marL="342900" indent="-342900">
-              <a:spcAft>
-                <a:spcPts val="900"/>
-              </a:spcAft>
-              <a:buSzPct val="100000"/>
-              <a:buChar char="•"/>
-            </a:pPr>
-            <a:r>
-              <a:rPr lang="en-US" sz="1400" dirty="0">
-                <a:solidFill>
-                  <a:srgbClr val="403B33"/>
-                </a:solidFill>
-                <a:latin typeface="Calibri" pitchFamily="34" charset="0"/>
-                <a:ea typeface="Calibri" pitchFamily="34" charset="-122"/>
-                <a:cs typeface="Calibri" pitchFamily="34" charset="-120"/>
-              </a:rPr>
-              <a:t>Automatic SMS (needs DLT paperwork)</a:t>
-            </a:r>
-            <a:endParaRPr lang="en-US" sz="1400" dirty="0"/>
-          </a:p>
-        </p:txBody>
-      </p:sp>
-      <p:sp>
-        <p:nvSpPr>
-          <p:cNvPr id="10" name="Text 8"/>
-          <p:cNvSpPr/>
-          <p:nvPr/>
-        </p:nvSpPr>
-        <p:spPr>
-          <a:xfrm>
-            <a:off x="685800" y="5577840"/>
-            <a:ext cx="10789920" cy="411480"/>
-          </a:xfrm>
-          <a:prstGeom prst="rect">
-            <a:avLst/>
-          </a:prstGeom>
-          <a:noFill/>
-          <a:ln/>
-        </p:spPr>
-        <p:txBody>
-          <a:bodyPr wrap="square" lIns="0" tIns="0" rIns="0" bIns="0" rtlCol="0" anchor="ctr"/>
-          <a:lstStyle/>
-          <a:p>
-            <a:pPr indent="0" marL="0">
-              <a:buNone/>
-            </a:pPr>
-            <a:r>
-              <a:rPr lang="en-US" sz="1400" i="1" dirty="0">
-                <a:solidFill>
-                  <a:srgbClr val="706B5E"/>
-                </a:solidFill>
-                <a:latin typeface="Calibri" pitchFamily="34" charset="0"/>
-                <a:ea typeface="Calibri" pitchFamily="34" charset="-122"/>
-                <a:cs typeface="Calibri" pitchFamily="34" charset="-120"/>
-              </a:rPr>
-              <a:t>212 automated tests run on every change, so a fix in one place cannot quietly break another.</a:t>
-            </a:r>
-            <a:endParaRPr lang="en-US" sz="1400" dirty="0"/>
+              <a:t>The database holds the doctor roster and no real patients. Everything so far has been built and tested without a single patient record in it.</a:t>
+            </a:r>
+            <a:endParaRPr lang="en-US" sz="1300" dirty="0"/>
           </a:p>
         </p:txBody>
       </p:sp>
@@ -2828,7 +3013,7 @@
                 <a:ea typeface="Calibri" pitchFamily="34" charset="-122"/>
                 <a:cs typeface="Calibri" pitchFamily="34" charset="-120"/>
               </a:rPr>
-              <a:t>WHAT HAPPENS NEXT</a:t>
+              <a:t>THE IMPORTANT ONE</a:t>
             </a:r>
             <a:endParaRPr lang="en-US" sz="1100" dirty="0"/>
           </a:p>
@@ -2867,7 +3052,7 @@
                 <a:ea typeface="Cambria" pitchFamily="34" charset="-122"/>
                 <a:cs typeface="Cambria" pitchFamily="34" charset="-120"/>
               </a:rPr>
-              <a:t>Two steps to being live</a:t>
+              <a:t>It does not replace Klinique</a:t>
             </a:r>
             <a:endParaRPr lang="en-US" sz="3400" dirty="0"/>
           </a:p>
@@ -2882,15 +3067,187 @@
         <p:spPr>
           <a:xfrm>
             <a:off x="685800" y="1737360"/>
-            <a:ext cx="10789920" cy="1874520"/>
+            <a:ext cx="5257800" cy="2834640"/>
           </a:xfrm>
           <a:prstGeom prst="roundRect">
             <a:avLst>
-              <a:gd name="adj" fmla="val 3902"/>
+              <a:gd name="adj" fmla="val 2581"/>
             </a:avLst>
           </a:prstGeom>
           <a:solidFill>
-            <a:srgbClr val="FFFFFF"/>
+            <a:srgbClr val="EEF6F4"/>
+          </a:solidFill>
+          <a:ln w="12700">
+            <a:solidFill>
+              <a:srgbClr val="72B7AB"/>
+            </a:solidFill>
+            <a:prstDash val="solid"/>
+          </a:ln>
+        </p:spPr>
+      </p:sp>
+      <p:sp>
+        <p:nvSpPr>
+          <p:cNvPr id="5" name="Text 3"/>
+          <p:cNvSpPr/>
+          <p:nvPr/>
+        </p:nvSpPr>
+        <p:spPr>
+          <a:xfrm>
+            <a:off x="1005840" y="1965960"/>
+            <a:ext cx="4617720" cy="457200"/>
+          </a:xfrm>
+          <a:prstGeom prst="rect">
+            <a:avLst/>
+          </a:prstGeom>
+          <a:noFill/>
+          <a:ln/>
+        </p:spPr>
+        <p:txBody>
+          <a:bodyPr wrap="square" lIns="0" tIns="0" rIns="0" bIns="0" rtlCol="0" anchor="ctr"/>
+          <a:lstStyle/>
+          <a:p>
+            <a:pPr indent="0" marL="0">
+              <a:buNone/>
+            </a:pPr>
+            <a:r>
+              <a:rPr lang="en-US" sz="2400" b="1" dirty="0">
+                <a:solidFill>
+                  <a:srgbClr val="0E6A5C"/>
+                </a:solidFill>
+                <a:latin typeface="Cambria" pitchFamily="34" charset="0"/>
+                <a:ea typeface="Cambria" pitchFamily="34" charset="-122"/>
+                <a:cs typeface="Cambria" pitchFamily="34" charset="-120"/>
+              </a:rPr>
+              <a:t>This app</a:t>
+            </a:r>
+            <a:endParaRPr lang="en-US" sz="2400" dirty="0"/>
+          </a:p>
+        </p:txBody>
+      </p:sp>
+      <p:sp>
+        <p:nvSpPr>
+          <p:cNvPr id="6" name="Text 4"/>
+          <p:cNvSpPr/>
+          <p:nvPr/>
+        </p:nvSpPr>
+        <p:spPr>
+          <a:xfrm>
+            <a:off x="1005840" y="2560320"/>
+            <a:ext cx="4617720" cy="1828800"/>
+          </a:xfrm>
+          <a:prstGeom prst="rect">
+            <a:avLst/>
+          </a:prstGeom>
+          <a:noFill/>
+          <a:ln/>
+        </p:spPr>
+        <p:txBody>
+          <a:bodyPr wrap="square" lIns="0" tIns="0" rIns="0" bIns="0" rtlCol="0" anchor="ctr"/>
+          <a:lstStyle/>
+          <a:p>
+            <a:pPr marL="342900" indent="-342900">
+              <a:spcAft>
+                <a:spcPts val="800"/>
+              </a:spcAft>
+              <a:buSzPct val="100000"/>
+              <a:buChar char="•"/>
+            </a:pPr>
+            <a:r>
+              <a:rPr lang="en-US" sz="1400" dirty="0">
+                <a:solidFill>
+                  <a:srgbClr val="403B33"/>
+                </a:solidFill>
+                <a:latin typeface="Calibri" pitchFamily="34" charset="0"/>
+                <a:ea typeface="Calibri" pitchFamily="34" charset="-122"/>
+                <a:cs typeface="Calibri" pitchFamily="34" charset="-120"/>
+              </a:rPr>
+              <a:t>The public booking page</a:t>
+            </a:r>
+            <a:endParaRPr lang="en-US" sz="1400" dirty="0"/>
+          </a:p>
+          <a:p>
+            <a:pPr marL="342900" indent="-342900">
+              <a:spcAft>
+                <a:spcPts val="800"/>
+              </a:spcAft>
+              <a:buSzPct val="100000"/>
+              <a:buChar char="•"/>
+            </a:pPr>
+            <a:r>
+              <a:rPr lang="en-US" sz="1400" dirty="0">
+                <a:solidFill>
+                  <a:srgbClr val="403B33"/>
+                </a:solidFill>
+                <a:latin typeface="Calibri" pitchFamily="34" charset="0"/>
+                <a:ea typeface="Calibri" pitchFamily="34" charset="-122"/>
+                <a:cs typeface="Calibri" pitchFamily="34" charset="-120"/>
+              </a:rPr>
+              <a:t>Departments, doctors, fees, free times</a:t>
+            </a:r>
+            <a:endParaRPr lang="en-US" sz="1400" dirty="0"/>
+          </a:p>
+          <a:p>
+            <a:pPr marL="342900" indent="-342900">
+              <a:spcAft>
+                <a:spcPts val="800"/>
+              </a:spcAft>
+              <a:buSzPct val="100000"/>
+              <a:buChar char="•"/>
+            </a:pPr>
+            <a:r>
+              <a:rPr lang="en-US" sz="1400" dirty="0">
+                <a:solidFill>
+                  <a:srgbClr val="403B33"/>
+                </a:solidFill>
+                <a:latin typeface="Calibri" pitchFamily="34" charset="0"/>
+                <a:ea typeface="Calibri" pitchFamily="34" charset="-122"/>
+                <a:cs typeface="Calibri" pitchFamily="34" charset="-120"/>
+              </a:rPr>
+              <a:t>The reception screen</a:t>
+            </a:r>
+            <a:endParaRPr lang="en-US" sz="1400" dirty="0"/>
+          </a:p>
+          <a:p>
+            <a:pPr marL="342900" indent="-342900">
+              <a:spcAft>
+                <a:spcPts val="800"/>
+              </a:spcAft>
+              <a:buSzPct val="100000"/>
+              <a:buChar char="•"/>
+            </a:pPr>
+            <a:r>
+              <a:rPr lang="en-US" sz="1400" dirty="0">
+                <a:solidFill>
+                  <a:srgbClr val="403B33"/>
+                </a:solidFill>
+                <a:latin typeface="Calibri" pitchFamily="34" charset="0"/>
+                <a:ea typeface="Calibri" pitchFamily="34" charset="-122"/>
+                <a:cs typeface="Calibri" pitchFamily="34" charset="-120"/>
+              </a:rPr>
+              <a:t>Sends the patient their appointment</a:t>
+            </a:r>
+            <a:endParaRPr lang="en-US" sz="1400" dirty="0"/>
+          </a:p>
+        </p:txBody>
+      </p:sp>
+      <p:sp>
+        <p:nvSpPr>
+          <p:cNvPr id="7" name="Shape 5"/>
+          <p:cNvSpPr/>
+          <p:nvPr/>
+        </p:nvSpPr>
+        <p:spPr>
+          <a:xfrm>
+            <a:off x="6217920" y="1737360"/>
+            <a:ext cx="5257800" cy="2834640"/>
+          </a:xfrm>
+          <a:prstGeom prst="roundRect">
+            <a:avLst>
+              <a:gd name="adj" fmla="val 2581"/>
+            </a:avLst>
+          </a:prstGeom>
+          <a:solidFill>
+            <a:srgbClr val="F4F2EC"/>
           </a:solidFill>
           <a:ln w="12700">
             <a:solidFill>
@@ -2902,73 +3259,14 @@
       </p:sp>
       <p:sp>
         <p:nvSpPr>
-          <p:cNvPr id="5" name="Shape 3"/>
-          <p:cNvSpPr/>
-          <p:nvPr/>
-        </p:nvSpPr>
-        <p:spPr>
-          <a:xfrm>
-            <a:off x="1051560" y="2084832"/>
-            <a:ext cx="621792" cy="621792"/>
-          </a:xfrm>
-          <a:prstGeom prst="ellipse">
-            <a:avLst/>
-          </a:prstGeom>
-          <a:solidFill>
-            <a:srgbClr val="0E6A5C"/>
-          </a:solidFill>
-          <a:ln/>
-        </p:spPr>
-      </p:sp>
-      <p:sp>
-        <p:nvSpPr>
-          <p:cNvPr id="6" name="Text 4"/>
-          <p:cNvSpPr/>
-          <p:nvPr/>
-        </p:nvSpPr>
-        <p:spPr>
-          <a:xfrm>
-            <a:off x="1051560" y="2084832"/>
-            <a:ext cx="621792" cy="621792"/>
-          </a:xfrm>
-          <a:prstGeom prst="rect">
-            <a:avLst/>
-          </a:prstGeom>
-          <a:noFill/>
-          <a:ln/>
-        </p:spPr>
-        <p:txBody>
-          <a:bodyPr wrap="square" lIns="0" tIns="0" rIns="0" bIns="0" rtlCol="0" anchor="ctr"/>
-          <a:lstStyle/>
-          <a:p>
-            <a:pPr algn="ctr" indent="0" marL="0">
-              <a:buNone/>
-            </a:pPr>
-            <a:r>
-              <a:rPr lang="en-US" sz="1500" b="1" dirty="0">
-                <a:solidFill>
-                  <a:srgbClr val="FFFFFF"/>
-                </a:solidFill>
-                <a:latin typeface="Calibri" pitchFamily="34" charset="0"/>
-                <a:ea typeface="Calibri" pitchFamily="34" charset="-122"/>
-                <a:cs typeface="Calibri" pitchFamily="34" charset="-120"/>
-              </a:rPr>
-              <a:t>1</a:t>
-            </a:r>
-            <a:endParaRPr lang="en-US" sz="1500" dirty="0"/>
-          </a:p>
-        </p:txBody>
-      </p:sp>
-      <p:sp>
-        <p:nvSpPr>
-          <p:cNvPr id="7" name="Text 5"/>
-          <p:cNvSpPr/>
-          <p:nvPr/>
-        </p:nvSpPr>
-        <p:spPr>
-          <a:xfrm>
-            <a:off x="1920240" y="2011680"/>
-            <a:ext cx="3657600" cy="411480"/>
+          <p:cNvPr id="8" name="Text 6"/>
+          <p:cNvSpPr/>
+          <p:nvPr/>
+        </p:nvSpPr>
+        <p:spPr>
+          <a:xfrm>
+            <a:off x="6537960" y="1965960"/>
+            <a:ext cx="4617720" cy="457200"/>
           </a:xfrm>
           <a:prstGeom prst="rect">
             <a:avLst/>
@@ -2992,7 +3290,7 @@
                 <a:ea typeface="Cambria" pitchFamily="34" charset="-122"/>
                 <a:cs typeface="Cambria" pitchFamily="34" charset="-120"/>
               </a:rPr>
-              <a:t>Go live</a:t>
+              <a:t>Klinique</a:t>
             </a:r>
             <a:endParaRPr lang="en-US" sz="2400" dirty="0"/>
           </a:p>
@@ -3000,72 +3298,34 @@
       </p:sp>
       <p:sp>
         <p:nvSpPr>
-          <p:cNvPr id="8" name="Text 6"/>
-          <p:cNvSpPr/>
-          <p:nvPr/>
-        </p:nvSpPr>
-        <p:spPr>
-          <a:xfrm>
-            <a:off x="1920240" y="2487168"/>
-            <a:ext cx="3657600" cy="320040"/>
-          </a:xfrm>
-          <a:prstGeom prst="rect">
-            <a:avLst/>
-          </a:prstGeom>
-          <a:noFill/>
-          <a:ln/>
-        </p:spPr>
-        <p:txBody>
-          <a:bodyPr wrap="square" lIns="0" tIns="0" rIns="0" bIns="0" rtlCol="0" anchor="ctr"/>
-          <a:lstStyle/>
-          <a:p>
-            <a:pPr indent="0" marL="0">
-              <a:buNone/>
-            </a:pPr>
-            <a:r>
-              <a:rPr lang="en-US" sz="1300" b="1" dirty="0">
-                <a:solidFill>
-                  <a:srgbClr val="0E6A5C"/>
-                </a:solidFill>
-                <a:latin typeface="Calibri" pitchFamily="34" charset="0"/>
-                <a:ea typeface="Calibri" pitchFamily="34" charset="-122"/>
-                <a:cs typeface="Calibri" pitchFamily="34" charset="-120"/>
-              </a:rPr>
-              <a:t>Four to six weeks</a:t>
-            </a:r>
-            <a:endParaRPr lang="en-US" sz="1300" dirty="0"/>
-          </a:p>
-        </p:txBody>
-      </p:sp>
-      <p:sp>
-        <p:nvSpPr>
           <p:cNvPr id="9" name="Text 7"/>
           <p:cNvSpPr/>
           <p:nvPr/>
         </p:nvSpPr>
         <p:spPr>
           <a:xfrm>
-            <a:off x="5715000" y="2011680"/>
-            <a:ext cx="5394960" cy="1371600"/>
-          </a:xfrm>
-          <a:prstGeom prst="rect">
-            <a:avLst/>
-          </a:prstGeom>
-          <a:noFill/>
-          <a:ln/>
-        </p:spPr>
-        <p:txBody>
-          <a:bodyPr wrap="square" lIns="0" tIns="0" rIns="0" bIns="0" rtlCol="0" anchor="ctr"/>
-          <a:lstStyle/>
-          <a:p>
-            <a:pPr indent="0" marL="0">
-              <a:lnSpc>
-                <a:spcPts val="2000"/>
-              </a:lnSpc>
-              <a:buNone/>
-            </a:pPr>
-            <a:r>
-              <a:rPr lang="en-US" sz="1300" dirty="0">
+            <a:off x="6537960" y="2560320"/>
+            <a:ext cx="4617720" cy="1828800"/>
+          </a:xfrm>
+          <a:prstGeom prst="rect">
+            <a:avLst/>
+          </a:prstGeom>
+          <a:noFill/>
+          <a:ln/>
+        </p:spPr>
+        <p:txBody>
+          <a:bodyPr wrap="square" lIns="0" tIns="0" rIns="0" bIns="0" rtlCol="0" anchor="ctr"/>
+          <a:lstStyle/>
+          <a:p>
+            <a:pPr marL="342900" indent="-342900">
+              <a:spcAft>
+                <a:spcPts val="800"/>
+              </a:spcAft>
+              <a:buSzPct val="100000"/>
+              <a:buChar char="•"/>
+            </a:pPr>
+            <a:r>
+              <a:rPr lang="en-US" sz="1400" dirty="0">
                 <a:solidFill>
                   <a:srgbClr val="403B33"/>
                 </a:solidFill>
@@ -3073,9 +3333,72 @@
                 <a:ea typeface="Calibri" pitchFamily="34" charset="-122"/>
                 <a:cs typeface="Calibri" pitchFamily="34" charset="-120"/>
               </a:rPr>
-              <a:t>A domain and a server in India, the registration numbers entered, hours and fees confirmed, and reception trained on the manual. Start with two or three departments rather than all 21 — reception learns on a small volume and the rest open by ticking a box.</a:t>
-            </a:r>
-            <a:endParaRPr lang="en-US" sz="1300" dirty="0"/>
+              <a:t>The clinical record</a:t>
+            </a:r>
+            <a:endParaRPr lang="en-US" sz="1400" dirty="0"/>
+          </a:p>
+          <a:p>
+            <a:pPr marL="342900" indent="-342900">
+              <a:spcAft>
+                <a:spcPts val="800"/>
+              </a:spcAft>
+              <a:buSzPct val="100000"/>
+              <a:buChar char="•"/>
+            </a:pPr>
+            <a:r>
+              <a:rPr lang="en-US" sz="1400" dirty="0">
+                <a:solidFill>
+                  <a:srgbClr val="403B33"/>
+                </a:solidFill>
+                <a:latin typeface="Calibri" pitchFamily="34" charset="0"/>
+                <a:ea typeface="Calibri" pitchFamily="34" charset="-122"/>
+                <a:cs typeface="Calibri" pitchFamily="34" charset="-120"/>
+              </a:rPr>
+              <a:t>Prescriptions and consultation notes</a:t>
+            </a:r>
+            <a:endParaRPr lang="en-US" sz="1400" dirty="0"/>
+          </a:p>
+          <a:p>
+            <a:pPr marL="342900" indent="-342900">
+              <a:spcAft>
+                <a:spcPts val="800"/>
+              </a:spcAft>
+              <a:buSzPct val="100000"/>
+              <a:buChar char="•"/>
+            </a:pPr>
+            <a:r>
+              <a:rPr lang="en-US" sz="1400" dirty="0">
+                <a:solidFill>
+                  <a:srgbClr val="403B33"/>
+                </a:solidFill>
+                <a:latin typeface="Calibri" pitchFamily="34" charset="0"/>
+                <a:ea typeface="Calibri" pitchFamily="34" charset="-122"/>
+                <a:cs typeface="Calibri" pitchFamily="34" charset="-120"/>
+              </a:rPr>
+              <a:t>Patient history</a:t>
+            </a:r>
+            <a:endParaRPr lang="en-US" sz="1400" dirty="0"/>
+          </a:p>
+          <a:p>
+            <a:pPr marL="342900" indent="-342900">
+              <a:spcAft>
+                <a:spcPts val="800"/>
+              </a:spcAft>
+              <a:buSzPct val="100000"/>
+              <a:buChar char="•"/>
+            </a:pPr>
+            <a:r>
+              <a:rPr lang="en-US" sz="1400" dirty="0">
+                <a:solidFill>
+                  <a:srgbClr val="403B33"/>
+                </a:solidFill>
+                <a:latin typeface="Calibri" pitchFamily="34" charset="0"/>
+                <a:ea typeface="Calibri" pitchFamily="34" charset="-122"/>
+                <a:cs typeface="Calibri" pitchFamily="34" charset="-120"/>
+              </a:rPr>
+              <a:t>What the doctors already use every day</a:t>
+            </a:r>
+            <a:endParaRPr lang="en-US" sz="1400" dirty="0"/>
           </a:p>
         </p:txBody>
       </p:sp>
@@ -3087,20 +3410,20 @@
         </p:nvSpPr>
         <p:spPr>
           <a:xfrm>
-            <a:off x="685800" y="3886200"/>
-            <a:ext cx="10789920" cy="1874520"/>
+            <a:off x="685800" y="4846320"/>
+            <a:ext cx="10789920" cy="1188720"/>
           </a:xfrm>
           <a:prstGeom prst="roundRect">
             <a:avLst>
-              <a:gd name="adj" fmla="val 3902"/>
+              <a:gd name="adj" fmla="val 6154"/>
             </a:avLst>
           </a:prstGeom>
           <a:solidFill>
-            <a:srgbClr val="FFFFFF"/>
+            <a:srgbClr val="052B26"/>
           </a:solidFill>
           <a:ln w="12700">
             <a:solidFill>
-              <a:srgbClr val="E7E3D9"/>
+              <a:srgbClr val="052B26"/>
             </a:solidFill>
             <a:prstDash val="solid"/>
           </a:ln>
@@ -3108,34 +3431,14 @@
       </p:sp>
       <p:sp>
         <p:nvSpPr>
-          <p:cNvPr id="11" name="Shape 9"/>
-          <p:cNvSpPr/>
-          <p:nvPr/>
-        </p:nvSpPr>
-        <p:spPr>
-          <a:xfrm>
-            <a:off x="1051560" y="4233672"/>
-            <a:ext cx="621792" cy="621792"/>
-          </a:xfrm>
-          <a:prstGeom prst="ellipse">
-            <a:avLst/>
-          </a:prstGeom>
-          <a:solidFill>
-            <a:srgbClr val="0E6A5C"/>
-          </a:solidFill>
-          <a:ln/>
-        </p:spPr>
-      </p:sp>
-      <p:sp>
-        <p:nvSpPr>
-          <p:cNvPr id="12" name="Text 10"/>
-          <p:cNvSpPr/>
-          <p:nvPr/>
-        </p:nvSpPr>
-        <p:spPr>
-          <a:xfrm>
-            <a:off x="1051560" y="4233672"/>
-            <a:ext cx="621792" cy="621792"/>
+          <p:cNvPr id="11" name="Text 9"/>
+          <p:cNvSpPr/>
+          <p:nvPr/>
+        </p:nvSpPr>
+        <p:spPr>
+          <a:xfrm>
+            <a:off x="1143000" y="5029200"/>
+            <a:ext cx="9875520" cy="822960"/>
           </a:xfrm>
           <a:prstGeom prst="rect">
             <a:avLst/>
@@ -3148,140 +3451,23 @@
           <a:lstStyle/>
           <a:p>
             <a:pPr algn="ctr" indent="0" marL="0">
-              <a:buNone/>
-            </a:pPr>
-            <a:r>
-              <a:rPr lang="en-US" sz="1500" b="1" dirty="0">
+              <a:lnSpc>
+                <a:spcPts val="2400"/>
+              </a:lnSpc>
+              <a:buNone/>
+            </a:pPr>
+            <a:r>
+              <a:rPr lang="en-US" sz="1600" i="1" dirty="0">
                 <a:solidFill>
                   <a:srgbClr val="FFFFFF"/>
-                </a:solidFill>
-                <a:latin typeface="Calibri" pitchFamily="34" charset="0"/>
-                <a:ea typeface="Calibri" pitchFamily="34" charset="-122"/>
-                <a:cs typeface="Calibri" pitchFamily="34" charset="-120"/>
-              </a:rPr>
-              <a:t>2</a:t>
-            </a:r>
-            <a:endParaRPr lang="en-US" sz="1500" dirty="0"/>
-          </a:p>
-        </p:txBody>
-      </p:sp>
-      <p:sp>
-        <p:nvSpPr>
-          <p:cNvPr id="13" name="Text 11"/>
-          <p:cNvSpPr/>
-          <p:nvPr/>
-        </p:nvSpPr>
-        <p:spPr>
-          <a:xfrm>
-            <a:off x="1920240" y="4160520"/>
-            <a:ext cx="3657600" cy="411480"/>
-          </a:xfrm>
-          <a:prstGeom prst="rect">
-            <a:avLst/>
-          </a:prstGeom>
-          <a:noFill/>
-          <a:ln/>
-        </p:spPr>
-        <p:txBody>
-          <a:bodyPr wrap="square" lIns="0" tIns="0" rIns="0" bIns="0" rtlCol="0" anchor="ctr"/>
-          <a:lstStyle/>
-          <a:p>
-            <a:pPr indent="0" marL="0">
-              <a:buNone/>
-            </a:pPr>
-            <a:r>
-              <a:rPr lang="en-US" sz="2400" b="1" dirty="0">
-                <a:solidFill>
-                  <a:srgbClr val="16130F"/>
                 </a:solidFill>
                 <a:latin typeface="Cambria" pitchFamily="34" charset="0"/>
                 <a:ea typeface="Cambria" pitchFamily="34" charset="-122"/>
                 <a:cs typeface="Cambria" pitchFamily="34" charset="-120"/>
               </a:rPr>
-              <a:t>Remove the typing</a:t>
-            </a:r>
-            <a:endParaRPr lang="en-US" sz="2400" dirty="0"/>
-          </a:p>
-        </p:txBody>
-      </p:sp>
-      <p:sp>
-        <p:nvSpPr>
-          <p:cNvPr id="14" name="Text 12"/>
-          <p:cNvSpPr/>
-          <p:nvPr/>
-        </p:nvSpPr>
-        <p:spPr>
-          <a:xfrm>
-            <a:off x="1920240" y="4636008"/>
-            <a:ext cx="3657600" cy="320040"/>
-          </a:xfrm>
-          <a:prstGeom prst="rect">
-            <a:avLst/>
-          </a:prstGeom>
-          <a:noFill/>
-          <a:ln/>
-        </p:spPr>
-        <p:txBody>
-          <a:bodyPr wrap="square" lIns="0" tIns="0" rIns="0" bIns="0" rtlCol="0" anchor="ctr"/>
-          <a:lstStyle/>
-          <a:p>
-            <a:pPr indent="0" marL="0">
-              <a:buNone/>
-            </a:pPr>
-            <a:r>
-              <a:rPr lang="en-US" sz="1300" b="1" dirty="0">
-                <a:solidFill>
-                  <a:srgbClr val="0E6A5C"/>
-                </a:solidFill>
-                <a:latin typeface="Calibri" pitchFamily="34" charset="0"/>
-                <a:ea typeface="Calibri" pitchFamily="34" charset="-122"/>
-                <a:cs typeface="Calibri" pitchFamily="34" charset="-120"/>
-              </a:rPr>
-              <a:t>After Klinique replies</a:t>
-            </a:r>
-            <a:endParaRPr lang="en-US" sz="1300" dirty="0"/>
-          </a:p>
-        </p:txBody>
-      </p:sp>
-      <p:sp>
-        <p:nvSpPr>
-          <p:cNvPr id="15" name="Text 13"/>
-          <p:cNvSpPr/>
-          <p:nvPr/>
-        </p:nvSpPr>
-        <p:spPr>
-          <a:xfrm>
-            <a:off x="5715000" y="4160520"/>
-            <a:ext cx="5394960" cy="1371600"/>
-          </a:xfrm>
-          <a:prstGeom prst="rect">
-            <a:avLst/>
-          </a:prstGeom>
-          <a:noFill/>
-          <a:ln/>
-        </p:spPr>
-        <p:txBody>
-          <a:bodyPr wrap="square" lIns="0" tIns="0" rIns="0" bIns="0" rtlCol="0" anchor="ctr"/>
-          <a:lstStyle/>
-          <a:p>
-            <a:pPr indent="0" marL="0">
-              <a:lnSpc>
-                <a:spcPts val="2000"/>
-              </a:lnSpc>
-              <a:buNone/>
-            </a:pPr>
-            <a:r>
-              <a:rPr lang="en-US" sz="1300" dirty="0">
-                <a:solidFill>
-                  <a:srgbClr val="403B33"/>
-                </a:solidFill>
-                <a:latin typeface="Calibri" pitchFamily="34" charset="0"/>
-                <a:ea typeface="Calibri" pitchFamily="34" charset="-122"/>
-                <a:cs typeface="Calibri" pitchFamily="34" charset="-120"/>
-              </a:rPr>
-              <a:t>Bookings pass into Klinique by themselves instead of being copied across by hand. It needs either an access key from Klinique or one booking captured from their own form. Quoted separately, because it depends on what they will give us.</a:t>
-            </a:r>
-            <a:endParaRPr lang="en-US" sz="1300" dirty="0"/>
+              <a:t>There is deliberately no second place to write a prescription. Two records that can disagree about one patient is a real danger, and avoiding it was worth more than the convenience.</a:t>
+            </a:r>
+            <a:endParaRPr lang="en-US" sz="1600" dirty="0"/>
           </a:p>
         </p:txBody>
       </p:sp>
@@ -3296,6 +3482,1063 @@
 <file path=ppt/slides/slide12.xml><?xml version="1.0" encoding="utf-8"?>
 <p:sld xmlns:a="http://schemas.openxmlformats.org/drawingml/2006/main" xmlns:r="http://schemas.openxmlformats.org/officeDocument/2006/relationships" xmlns:p="http://schemas.openxmlformats.org/presentationml/2006/main">
   <p:cSld name="Slide 12">
+    <p:bg>
+      <p:bgPr>
+        <a:solidFill>
+          <a:srgbClr val="FAF9F6"/>
+        </a:solidFill>
+      </p:bgPr>
+    </p:bg>
+    <p:spTree>
+      <p:nvGrpSpPr>
+        <p:cNvPr id="1" name=""/>
+        <p:cNvGrpSpPr/>
+        <p:nvPr/>
+      </p:nvGrpSpPr>
+      <p:grpSpPr>
+        <a:xfrm>
+          <a:off x="0" y="0"/>
+          <a:ext cx="0" cy="0"/>
+          <a:chOff x="0" y="0"/>
+          <a:chExt cx="0" cy="0"/>
+        </a:xfrm>
+      </p:grpSpPr>
+      <p:sp>
+        <p:nvSpPr>
+          <p:cNvPr id="2" name="Text 0"/>
+          <p:cNvSpPr/>
+          <p:nvPr/>
+        </p:nvSpPr>
+        <p:spPr>
+          <a:xfrm>
+            <a:off x="685800" y="384048"/>
+            <a:ext cx="10789920" cy="237744"/>
+          </a:xfrm>
+          <a:prstGeom prst="rect">
+            <a:avLst/>
+          </a:prstGeom>
+          <a:noFill/>
+          <a:ln/>
+        </p:spPr>
+        <p:txBody>
+          <a:bodyPr wrap="square" lIns="0" tIns="0" rIns="0" bIns="0" rtlCol="0" anchor="ctr"/>
+          <a:lstStyle/>
+          <a:p>
+            <a:pPr indent="0" marL="0">
+              <a:buNone/>
+            </a:pPr>
+            <a:r>
+              <a:rPr lang="en-US" sz="1100" b="1" spc="200" kern="0" dirty="0">
+                <a:solidFill>
+                  <a:srgbClr val="0E6A5C"/>
+                </a:solidFill>
+                <a:latin typeface="Calibri" pitchFamily="34" charset="0"/>
+                <a:ea typeface="Calibri" pitchFamily="34" charset="-122"/>
+                <a:cs typeface="Calibri" pitchFamily="34" charset="-120"/>
+              </a:rPr>
+              <a:t>WHERE IT STANDS</a:t>
+            </a:r>
+            <a:endParaRPr lang="en-US" sz="1100" dirty="0"/>
+          </a:p>
+        </p:txBody>
+      </p:sp>
+      <p:sp>
+        <p:nvSpPr>
+          <p:cNvPr id="3" name="Text 1"/>
+          <p:cNvSpPr/>
+          <p:nvPr/>
+        </p:nvSpPr>
+        <p:spPr>
+          <a:xfrm>
+            <a:off x="685800" y="658368"/>
+            <a:ext cx="10789920" cy="777240"/>
+          </a:xfrm>
+          <a:prstGeom prst="rect">
+            <a:avLst/>
+          </a:prstGeom>
+          <a:noFill/>
+          <a:ln/>
+        </p:spPr>
+        <p:txBody>
+          <a:bodyPr wrap="square" lIns="0" tIns="0" rIns="0" bIns="0" rtlCol="0" anchor="ctr"/>
+          <a:lstStyle/>
+          <a:p>
+            <a:pPr indent="0" marL="0">
+              <a:buNone/>
+            </a:pPr>
+            <a:r>
+              <a:rPr lang="en-US" sz="3400" b="1" dirty="0">
+                <a:solidFill>
+                  <a:srgbClr val="16130F"/>
+                </a:solidFill>
+                <a:latin typeface="Cambria" pitchFamily="34" charset="0"/>
+                <a:ea typeface="Cambria" pitchFamily="34" charset="-122"/>
+                <a:cs typeface="Cambria" pitchFamily="34" charset="-120"/>
+              </a:rPr>
+              <a:t>What is finished and what is not</a:t>
+            </a:r>
+            <a:endParaRPr lang="en-US" sz="3400" dirty="0"/>
+          </a:p>
+        </p:txBody>
+      </p:sp>
+      <p:sp>
+        <p:nvSpPr>
+          <p:cNvPr id="4" name="Shape 2"/>
+          <p:cNvSpPr/>
+          <p:nvPr/>
+        </p:nvSpPr>
+        <p:spPr>
+          <a:xfrm>
+            <a:off x="685800" y="1737360"/>
+            <a:ext cx="5257800" cy="3566160"/>
+          </a:xfrm>
+          <a:prstGeom prst="roundRect">
+            <a:avLst>
+              <a:gd name="adj" fmla="val 2051"/>
+            </a:avLst>
+          </a:prstGeom>
+          <a:solidFill>
+            <a:srgbClr val="EEF6F4"/>
+          </a:solidFill>
+          <a:ln w="12700">
+            <a:solidFill>
+              <a:srgbClr val="E7E3D9"/>
+            </a:solidFill>
+            <a:prstDash val="solid"/>
+          </a:ln>
+        </p:spPr>
+      </p:sp>
+      <p:sp>
+        <p:nvSpPr>
+          <p:cNvPr id="5" name="Text 3"/>
+          <p:cNvSpPr/>
+          <p:nvPr/>
+        </p:nvSpPr>
+        <p:spPr>
+          <a:xfrm>
+            <a:off x="1005840" y="1965960"/>
+            <a:ext cx="4617720" cy="411480"/>
+          </a:xfrm>
+          <a:prstGeom prst="rect">
+            <a:avLst/>
+          </a:prstGeom>
+          <a:noFill/>
+          <a:ln/>
+        </p:spPr>
+        <p:txBody>
+          <a:bodyPr wrap="square" lIns="0" tIns="0" rIns="0" bIns="0" rtlCol="0" anchor="ctr"/>
+          <a:lstStyle/>
+          <a:p>
+            <a:pPr indent="0" marL="0">
+              <a:buNone/>
+            </a:pPr>
+            <a:r>
+              <a:rPr lang="en-US" sz="2200" b="1" dirty="0">
+                <a:solidFill>
+                  <a:srgbClr val="0E6A5C"/>
+                </a:solidFill>
+                <a:latin typeface="Cambria" pitchFamily="34" charset="0"/>
+                <a:ea typeface="Cambria" pitchFamily="34" charset="-122"/>
+                <a:cs typeface="Cambria" pitchFamily="34" charset="-120"/>
+              </a:rPr>
+              <a:t>Built and tested</a:t>
+            </a:r>
+            <a:endParaRPr lang="en-US" sz="2200" dirty="0"/>
+          </a:p>
+        </p:txBody>
+      </p:sp>
+      <p:sp>
+        <p:nvSpPr>
+          <p:cNvPr id="6" name="Text 4"/>
+          <p:cNvSpPr/>
+          <p:nvPr/>
+        </p:nvSpPr>
+        <p:spPr>
+          <a:xfrm>
+            <a:off x="1005840" y="2514600"/>
+            <a:ext cx="4617720" cy="2651760"/>
+          </a:xfrm>
+          <a:prstGeom prst="rect">
+            <a:avLst/>
+          </a:prstGeom>
+          <a:noFill/>
+          <a:ln/>
+        </p:spPr>
+        <p:txBody>
+          <a:bodyPr wrap="square" lIns="0" tIns="0" rIns="0" bIns="0" rtlCol="0" anchor="ctr"/>
+          <a:lstStyle/>
+          <a:p>
+            <a:pPr marL="342900" indent="-342900">
+              <a:spcAft>
+                <a:spcPts val="900"/>
+              </a:spcAft>
+              <a:buSzPct val="100000"/>
+              <a:buChar char="•"/>
+            </a:pPr>
+            <a:r>
+              <a:rPr lang="en-US" sz="1400" dirty="0">
+                <a:solidFill>
+                  <a:srgbClr val="403B33"/>
+                </a:solidFill>
+                <a:latin typeface="Calibri" pitchFamily="34" charset="0"/>
+                <a:ea typeface="Calibri" pitchFamily="34" charset="-122"/>
+                <a:cs typeface="Calibri" pitchFamily="34" charset="-120"/>
+              </a:rPr>
+              <a:t>Patient booking, three languages</a:t>
+            </a:r>
+            <a:endParaRPr lang="en-US" sz="1400" dirty="0"/>
+          </a:p>
+          <a:p>
+            <a:pPr marL="342900" indent="-342900">
+              <a:spcAft>
+                <a:spcPts val="900"/>
+              </a:spcAft>
+              <a:buSzPct val="100000"/>
+              <a:buChar char="•"/>
+            </a:pPr>
+            <a:r>
+              <a:rPr lang="en-US" sz="1400" dirty="0">
+                <a:solidFill>
+                  <a:srgbClr val="403B33"/>
+                </a:solidFill>
+                <a:latin typeface="Calibri" pitchFamily="34" charset="0"/>
+                <a:ea typeface="Calibri" pitchFamily="34" charset="-122"/>
+                <a:cs typeface="Calibri" pitchFamily="34" charset="-120"/>
+              </a:rPr>
+              <a:t>The reception desk</a:t>
+            </a:r>
+            <a:endParaRPr lang="en-US" sz="1400" dirty="0"/>
+          </a:p>
+          <a:p>
+            <a:pPr marL="342900" indent="-342900">
+              <a:spcAft>
+                <a:spcPts val="900"/>
+              </a:spcAft>
+              <a:buSzPct val="100000"/>
+              <a:buChar char="•"/>
+            </a:pPr>
+            <a:r>
+              <a:rPr lang="en-US" sz="1400" dirty="0">
+                <a:solidFill>
+                  <a:srgbClr val="403B33"/>
+                </a:solidFill>
+                <a:latin typeface="Calibri" pitchFamily="34" charset="0"/>
+                <a:ea typeface="Calibri" pitchFamily="34" charset="-122"/>
+                <a:cs typeface="Calibri" pitchFamily="34" charset="-120"/>
+              </a:rPr>
+              <a:t>Written confirmation to patients</a:t>
+            </a:r>
+            <a:endParaRPr lang="en-US" sz="1400" dirty="0"/>
+          </a:p>
+          <a:p>
+            <a:pPr marL="342900" indent="-342900">
+              <a:spcAft>
+                <a:spcPts val="900"/>
+              </a:spcAft>
+              <a:buSzPct val="100000"/>
+              <a:buChar char="•"/>
+            </a:pPr>
+            <a:r>
+              <a:rPr lang="en-US" sz="1400" dirty="0">
+                <a:solidFill>
+                  <a:srgbClr val="403B33"/>
+                </a:solidFill>
+                <a:latin typeface="Calibri" pitchFamily="34" charset="0"/>
+                <a:ea typeface="Calibri" pitchFamily="34" charset="-122"/>
+                <a:cs typeface="Calibri" pitchFamily="34" charset="-120"/>
+              </a:rPr>
+              <a:t>The worklist for Klinique</a:t>
+            </a:r>
+            <a:endParaRPr lang="en-US" sz="1400" dirty="0"/>
+          </a:p>
+          <a:p>
+            <a:pPr marL="342900" indent="-342900">
+              <a:spcAft>
+                <a:spcPts val="900"/>
+              </a:spcAft>
+              <a:buSzPct val="100000"/>
+              <a:buChar char="•"/>
+            </a:pPr>
+            <a:r>
+              <a:rPr lang="en-US" sz="1400" dirty="0">
+                <a:solidFill>
+                  <a:srgbClr val="403B33"/>
+                </a:solidFill>
+                <a:latin typeface="Calibri" pitchFamily="34" charset="0"/>
+                <a:ea typeface="Calibri" pitchFamily="34" charset="-122"/>
+                <a:cs typeface="Calibri" pitchFamily="34" charset="-120"/>
+              </a:rPr>
+              <a:t>A printed manual for the staff</a:t>
+            </a:r>
+            <a:endParaRPr lang="en-US" sz="1400" dirty="0"/>
+          </a:p>
+        </p:txBody>
+      </p:sp>
+      <p:sp>
+        <p:nvSpPr>
+          <p:cNvPr id="7" name="Shape 5"/>
+          <p:cNvSpPr/>
+          <p:nvPr/>
+        </p:nvSpPr>
+        <p:spPr>
+          <a:xfrm>
+            <a:off x="6217920" y="1737360"/>
+            <a:ext cx="5257800" cy="3566160"/>
+          </a:xfrm>
+          <a:prstGeom prst="roundRect">
+            <a:avLst>
+              <a:gd name="adj" fmla="val 2051"/>
+            </a:avLst>
+          </a:prstGeom>
+          <a:solidFill>
+            <a:srgbClr val="FDF6E7"/>
+          </a:solidFill>
+          <a:ln w="12700">
+            <a:solidFill>
+              <a:srgbClr val="E7E3D9"/>
+            </a:solidFill>
+            <a:prstDash val="solid"/>
+          </a:ln>
+        </p:spPr>
+      </p:sp>
+      <p:sp>
+        <p:nvSpPr>
+          <p:cNvPr id="8" name="Text 6"/>
+          <p:cNvSpPr/>
+          <p:nvPr/>
+        </p:nvSpPr>
+        <p:spPr>
+          <a:xfrm>
+            <a:off x="6537960" y="1965960"/>
+            <a:ext cx="4617720" cy="411480"/>
+          </a:xfrm>
+          <a:prstGeom prst="rect">
+            <a:avLst/>
+          </a:prstGeom>
+          <a:noFill/>
+          <a:ln/>
+        </p:spPr>
+        <p:txBody>
+          <a:bodyPr wrap="square" lIns="0" tIns="0" rIns="0" bIns="0" rtlCol="0" anchor="ctr"/>
+          <a:lstStyle/>
+          <a:p>
+            <a:pPr indent="0" marL="0">
+              <a:buNone/>
+            </a:pPr>
+            <a:r>
+              <a:rPr lang="en-US" sz="2200" b="1" dirty="0">
+                <a:solidFill>
+                  <a:srgbClr val="8A5A12"/>
+                </a:solidFill>
+                <a:latin typeface="Cambria" pitchFamily="34" charset="0"/>
+                <a:ea typeface="Cambria" pitchFamily="34" charset="-122"/>
+                <a:cs typeface="Cambria" pitchFamily="34" charset="-120"/>
+              </a:rPr>
+              <a:t>Still needed</a:t>
+            </a:r>
+            <a:endParaRPr lang="en-US" sz="2200" dirty="0"/>
+          </a:p>
+        </p:txBody>
+      </p:sp>
+      <p:sp>
+        <p:nvSpPr>
+          <p:cNvPr id="9" name="Text 7"/>
+          <p:cNvSpPr/>
+          <p:nvPr/>
+        </p:nvSpPr>
+        <p:spPr>
+          <a:xfrm>
+            <a:off x="6537960" y="2514600"/>
+            <a:ext cx="4617720" cy="2651760"/>
+          </a:xfrm>
+          <a:prstGeom prst="rect">
+            <a:avLst/>
+          </a:prstGeom>
+          <a:noFill/>
+          <a:ln/>
+        </p:spPr>
+        <p:txBody>
+          <a:bodyPr wrap="square" lIns="0" tIns="0" rIns="0" bIns="0" rtlCol="0" anchor="ctr"/>
+          <a:lstStyle/>
+          <a:p>
+            <a:pPr marL="342900" indent="-342900">
+              <a:spcAft>
+                <a:spcPts val="900"/>
+              </a:spcAft>
+              <a:buSzPct val="100000"/>
+              <a:buChar char="•"/>
+            </a:pPr>
+            <a:r>
+              <a:rPr lang="en-US" sz="1400" dirty="0">
+                <a:solidFill>
+                  <a:srgbClr val="403B33"/>
+                </a:solidFill>
+                <a:latin typeface="Calibri" pitchFamily="34" charset="0"/>
+                <a:ea typeface="Calibri" pitchFamily="34" charset="-122"/>
+                <a:cs typeface="Calibri" pitchFamily="34" charset="-120"/>
+              </a:rPr>
+              <a:t>A domain and hosting in India</a:t>
+            </a:r>
+            <a:endParaRPr lang="en-US" sz="1400" dirty="0"/>
+          </a:p>
+          <a:p>
+            <a:pPr marL="342900" indent="-342900">
+              <a:spcAft>
+                <a:spcPts val="900"/>
+              </a:spcAft>
+              <a:buSzPct val="100000"/>
+              <a:buChar char="•"/>
+            </a:pPr>
+            <a:r>
+              <a:rPr lang="en-US" sz="1400" dirty="0">
+                <a:solidFill>
+                  <a:srgbClr val="403B33"/>
+                </a:solidFill>
+                <a:latin typeface="Calibri" pitchFamily="34" charset="0"/>
+                <a:ea typeface="Calibri" pitchFamily="34" charset="-122"/>
+                <a:cs typeface="Calibri" pitchFamily="34" charset="-120"/>
+              </a:rPr>
+              <a:t>Registration numbers for all 18 doctors</a:t>
+            </a:r>
+            <a:endParaRPr lang="en-US" sz="1400" dirty="0"/>
+          </a:p>
+          <a:p>
+            <a:pPr marL="342900" indent="-342900">
+              <a:spcAft>
+                <a:spcPts val="900"/>
+              </a:spcAft>
+              <a:buSzPct val="100000"/>
+              <a:buChar char="•"/>
+            </a:pPr>
+            <a:r>
+              <a:rPr lang="en-US" sz="1400" dirty="0">
+                <a:solidFill>
+                  <a:srgbClr val="403B33"/>
+                </a:solidFill>
+                <a:latin typeface="Calibri" pitchFamily="34" charset="0"/>
+                <a:ea typeface="Calibri" pitchFamily="34" charset="-122"/>
+                <a:cs typeface="Calibri" pitchFamily="34" charset="-120"/>
+              </a:rPr>
+              <a:t>Hours and fees confirmed by the hospital</a:t>
+            </a:r>
+            <a:endParaRPr lang="en-US" sz="1400" dirty="0"/>
+          </a:p>
+          <a:p>
+            <a:pPr marL="342900" indent="-342900">
+              <a:spcAft>
+                <a:spcPts val="900"/>
+              </a:spcAft>
+              <a:buSzPct val="100000"/>
+              <a:buChar char="•"/>
+            </a:pPr>
+            <a:r>
+              <a:rPr lang="en-US" sz="1400" dirty="0">
+                <a:solidFill>
+                  <a:srgbClr val="403B33"/>
+                </a:solidFill>
+                <a:latin typeface="Calibri" pitchFamily="34" charset="0"/>
+                <a:ea typeface="Calibri" pitchFamily="34" charset="-122"/>
+                <a:cs typeface="Calibri" pitchFamily="34" charset="-120"/>
+              </a:rPr>
+              <a:t>Automatic transfer into Klinique</a:t>
+            </a:r>
+            <a:endParaRPr lang="en-US" sz="1400" dirty="0"/>
+          </a:p>
+          <a:p>
+            <a:pPr marL="342900" indent="-342900">
+              <a:spcAft>
+                <a:spcPts val="900"/>
+              </a:spcAft>
+              <a:buSzPct val="100000"/>
+              <a:buChar char="•"/>
+            </a:pPr>
+            <a:r>
+              <a:rPr lang="en-US" sz="1400" dirty="0">
+                <a:solidFill>
+                  <a:srgbClr val="403B33"/>
+                </a:solidFill>
+                <a:latin typeface="Calibri" pitchFamily="34" charset="0"/>
+                <a:ea typeface="Calibri" pitchFamily="34" charset="-122"/>
+                <a:cs typeface="Calibri" pitchFamily="34" charset="-120"/>
+              </a:rPr>
+              <a:t>Automatic SMS (needs DLT paperwork)</a:t>
+            </a:r>
+            <a:endParaRPr lang="en-US" sz="1400" dirty="0"/>
+          </a:p>
+        </p:txBody>
+      </p:sp>
+      <p:sp>
+        <p:nvSpPr>
+          <p:cNvPr id="10" name="Text 8"/>
+          <p:cNvSpPr/>
+          <p:nvPr/>
+        </p:nvSpPr>
+        <p:spPr>
+          <a:xfrm>
+            <a:off x="685800" y="5577840"/>
+            <a:ext cx="10789920" cy="411480"/>
+          </a:xfrm>
+          <a:prstGeom prst="rect">
+            <a:avLst/>
+          </a:prstGeom>
+          <a:noFill/>
+          <a:ln/>
+        </p:spPr>
+        <p:txBody>
+          <a:bodyPr wrap="square" lIns="0" tIns="0" rIns="0" bIns="0" rtlCol="0" anchor="ctr"/>
+          <a:lstStyle/>
+          <a:p>
+            <a:pPr indent="0" marL="0">
+              <a:buNone/>
+            </a:pPr>
+            <a:r>
+              <a:rPr lang="en-US" sz="1400" i="1" dirty="0">
+                <a:solidFill>
+                  <a:srgbClr val="706B5E"/>
+                </a:solidFill>
+                <a:latin typeface="Calibri" pitchFamily="34" charset="0"/>
+                <a:ea typeface="Calibri" pitchFamily="34" charset="-122"/>
+                <a:cs typeface="Calibri" pitchFamily="34" charset="-120"/>
+              </a:rPr>
+              <a:t>212 automated tests run on every change, so a fix in one place cannot quietly break another.</a:t>
+            </a:r>
+            <a:endParaRPr lang="en-US" sz="1400" dirty="0"/>
+          </a:p>
+        </p:txBody>
+      </p:sp>
+    </p:spTree>
+  </p:cSld>
+  <p:clrMapOvr>
+    <a:masterClrMapping/>
+  </p:clrMapOvr>
+</p:sld>
+</file>
+
+<file path=ppt/slides/slide13.xml><?xml version="1.0" encoding="utf-8"?>
+<p:sld xmlns:a="http://schemas.openxmlformats.org/drawingml/2006/main" xmlns:r="http://schemas.openxmlformats.org/officeDocument/2006/relationships" xmlns:p="http://schemas.openxmlformats.org/presentationml/2006/main">
+  <p:cSld name="Slide 13">
+    <p:bg>
+      <p:bgPr>
+        <a:solidFill>
+          <a:srgbClr val="FAF9F6"/>
+        </a:solidFill>
+      </p:bgPr>
+    </p:bg>
+    <p:spTree>
+      <p:nvGrpSpPr>
+        <p:cNvPr id="1" name=""/>
+        <p:cNvGrpSpPr/>
+        <p:nvPr/>
+      </p:nvGrpSpPr>
+      <p:grpSpPr>
+        <a:xfrm>
+          <a:off x="0" y="0"/>
+          <a:ext cx="0" cy="0"/>
+          <a:chOff x="0" y="0"/>
+          <a:chExt cx="0" cy="0"/>
+        </a:xfrm>
+      </p:grpSpPr>
+      <p:sp>
+        <p:nvSpPr>
+          <p:cNvPr id="2" name="Text 0"/>
+          <p:cNvSpPr/>
+          <p:nvPr/>
+        </p:nvSpPr>
+        <p:spPr>
+          <a:xfrm>
+            <a:off x="685800" y="384048"/>
+            <a:ext cx="10789920" cy="237744"/>
+          </a:xfrm>
+          <a:prstGeom prst="rect">
+            <a:avLst/>
+          </a:prstGeom>
+          <a:noFill/>
+          <a:ln/>
+        </p:spPr>
+        <p:txBody>
+          <a:bodyPr wrap="square" lIns="0" tIns="0" rIns="0" bIns="0" rtlCol="0" anchor="ctr"/>
+          <a:lstStyle/>
+          <a:p>
+            <a:pPr indent="0" marL="0">
+              <a:buNone/>
+            </a:pPr>
+            <a:r>
+              <a:rPr lang="en-US" sz="1100" b="1" spc="200" kern="0" dirty="0">
+                <a:solidFill>
+                  <a:srgbClr val="0E6A5C"/>
+                </a:solidFill>
+                <a:latin typeface="Calibri" pitchFamily="34" charset="0"/>
+                <a:ea typeface="Calibri" pitchFamily="34" charset="-122"/>
+                <a:cs typeface="Calibri" pitchFamily="34" charset="-120"/>
+              </a:rPr>
+              <a:t>WHAT HAPPENS NEXT</a:t>
+            </a:r>
+            <a:endParaRPr lang="en-US" sz="1100" dirty="0"/>
+          </a:p>
+        </p:txBody>
+      </p:sp>
+      <p:sp>
+        <p:nvSpPr>
+          <p:cNvPr id="3" name="Text 1"/>
+          <p:cNvSpPr/>
+          <p:nvPr/>
+        </p:nvSpPr>
+        <p:spPr>
+          <a:xfrm>
+            <a:off x="685800" y="658368"/>
+            <a:ext cx="10789920" cy="777240"/>
+          </a:xfrm>
+          <a:prstGeom prst="rect">
+            <a:avLst/>
+          </a:prstGeom>
+          <a:noFill/>
+          <a:ln/>
+        </p:spPr>
+        <p:txBody>
+          <a:bodyPr wrap="square" lIns="0" tIns="0" rIns="0" bIns="0" rtlCol="0" anchor="ctr"/>
+          <a:lstStyle/>
+          <a:p>
+            <a:pPr indent="0" marL="0">
+              <a:buNone/>
+            </a:pPr>
+            <a:r>
+              <a:rPr lang="en-US" sz="3400" b="1" dirty="0">
+                <a:solidFill>
+                  <a:srgbClr val="16130F"/>
+                </a:solidFill>
+                <a:latin typeface="Cambria" pitchFamily="34" charset="0"/>
+                <a:ea typeface="Cambria" pitchFamily="34" charset="-122"/>
+                <a:cs typeface="Cambria" pitchFamily="34" charset="-120"/>
+              </a:rPr>
+              <a:t>Two steps to being live</a:t>
+            </a:r>
+            <a:endParaRPr lang="en-US" sz="3400" dirty="0"/>
+          </a:p>
+        </p:txBody>
+      </p:sp>
+      <p:sp>
+        <p:nvSpPr>
+          <p:cNvPr id="4" name="Shape 2"/>
+          <p:cNvSpPr/>
+          <p:nvPr/>
+        </p:nvSpPr>
+        <p:spPr>
+          <a:xfrm>
+            <a:off x="685800" y="1737360"/>
+            <a:ext cx="10789920" cy="1874520"/>
+          </a:xfrm>
+          <a:prstGeom prst="roundRect">
+            <a:avLst>
+              <a:gd name="adj" fmla="val 3902"/>
+            </a:avLst>
+          </a:prstGeom>
+          <a:solidFill>
+            <a:srgbClr val="FFFFFF"/>
+          </a:solidFill>
+          <a:ln w="12700">
+            <a:solidFill>
+              <a:srgbClr val="E7E3D9"/>
+            </a:solidFill>
+            <a:prstDash val="solid"/>
+          </a:ln>
+        </p:spPr>
+      </p:sp>
+      <p:sp>
+        <p:nvSpPr>
+          <p:cNvPr id="5" name="Shape 3"/>
+          <p:cNvSpPr/>
+          <p:nvPr/>
+        </p:nvSpPr>
+        <p:spPr>
+          <a:xfrm>
+            <a:off x="1051560" y="2084832"/>
+            <a:ext cx="621792" cy="621792"/>
+          </a:xfrm>
+          <a:prstGeom prst="ellipse">
+            <a:avLst/>
+          </a:prstGeom>
+          <a:solidFill>
+            <a:srgbClr val="0E6A5C"/>
+          </a:solidFill>
+          <a:ln/>
+        </p:spPr>
+      </p:sp>
+      <p:sp>
+        <p:nvSpPr>
+          <p:cNvPr id="6" name="Text 4"/>
+          <p:cNvSpPr/>
+          <p:nvPr/>
+        </p:nvSpPr>
+        <p:spPr>
+          <a:xfrm>
+            <a:off x="1051560" y="2084832"/>
+            <a:ext cx="621792" cy="621792"/>
+          </a:xfrm>
+          <a:prstGeom prst="rect">
+            <a:avLst/>
+          </a:prstGeom>
+          <a:noFill/>
+          <a:ln/>
+        </p:spPr>
+        <p:txBody>
+          <a:bodyPr wrap="square" lIns="0" tIns="0" rIns="0" bIns="0" rtlCol="0" anchor="ctr"/>
+          <a:lstStyle/>
+          <a:p>
+            <a:pPr algn="ctr" indent="0" marL="0">
+              <a:buNone/>
+            </a:pPr>
+            <a:r>
+              <a:rPr lang="en-US" sz="1500" b="1" dirty="0">
+                <a:solidFill>
+                  <a:srgbClr val="FFFFFF"/>
+                </a:solidFill>
+                <a:latin typeface="Calibri" pitchFamily="34" charset="0"/>
+                <a:ea typeface="Calibri" pitchFamily="34" charset="-122"/>
+                <a:cs typeface="Calibri" pitchFamily="34" charset="-120"/>
+              </a:rPr>
+              <a:t>1</a:t>
+            </a:r>
+            <a:endParaRPr lang="en-US" sz="1500" dirty="0"/>
+          </a:p>
+        </p:txBody>
+      </p:sp>
+      <p:sp>
+        <p:nvSpPr>
+          <p:cNvPr id="7" name="Text 5"/>
+          <p:cNvSpPr/>
+          <p:nvPr/>
+        </p:nvSpPr>
+        <p:spPr>
+          <a:xfrm>
+            <a:off x="1920240" y="2011680"/>
+            <a:ext cx="3657600" cy="411480"/>
+          </a:xfrm>
+          <a:prstGeom prst="rect">
+            <a:avLst/>
+          </a:prstGeom>
+          <a:noFill/>
+          <a:ln/>
+        </p:spPr>
+        <p:txBody>
+          <a:bodyPr wrap="square" lIns="0" tIns="0" rIns="0" bIns="0" rtlCol="0" anchor="ctr"/>
+          <a:lstStyle/>
+          <a:p>
+            <a:pPr indent="0" marL="0">
+              <a:buNone/>
+            </a:pPr>
+            <a:r>
+              <a:rPr lang="en-US" sz="2400" b="1" dirty="0">
+                <a:solidFill>
+                  <a:srgbClr val="16130F"/>
+                </a:solidFill>
+                <a:latin typeface="Cambria" pitchFamily="34" charset="0"/>
+                <a:ea typeface="Cambria" pitchFamily="34" charset="-122"/>
+                <a:cs typeface="Cambria" pitchFamily="34" charset="-120"/>
+              </a:rPr>
+              <a:t>Go live</a:t>
+            </a:r>
+            <a:endParaRPr lang="en-US" sz="2400" dirty="0"/>
+          </a:p>
+        </p:txBody>
+      </p:sp>
+      <p:sp>
+        <p:nvSpPr>
+          <p:cNvPr id="8" name="Text 6"/>
+          <p:cNvSpPr/>
+          <p:nvPr/>
+        </p:nvSpPr>
+        <p:spPr>
+          <a:xfrm>
+            <a:off x="1920240" y="2487168"/>
+            <a:ext cx="3657600" cy="320040"/>
+          </a:xfrm>
+          <a:prstGeom prst="rect">
+            <a:avLst/>
+          </a:prstGeom>
+          <a:noFill/>
+          <a:ln/>
+        </p:spPr>
+        <p:txBody>
+          <a:bodyPr wrap="square" lIns="0" tIns="0" rIns="0" bIns="0" rtlCol="0" anchor="ctr"/>
+          <a:lstStyle/>
+          <a:p>
+            <a:pPr indent="0" marL="0">
+              <a:buNone/>
+            </a:pPr>
+            <a:r>
+              <a:rPr lang="en-US" sz="1300" b="1" dirty="0">
+                <a:solidFill>
+                  <a:srgbClr val="0E6A5C"/>
+                </a:solidFill>
+                <a:latin typeface="Calibri" pitchFamily="34" charset="0"/>
+                <a:ea typeface="Calibri" pitchFamily="34" charset="-122"/>
+                <a:cs typeface="Calibri" pitchFamily="34" charset="-120"/>
+              </a:rPr>
+              <a:t>Four to six weeks</a:t>
+            </a:r>
+            <a:endParaRPr lang="en-US" sz="1300" dirty="0"/>
+          </a:p>
+        </p:txBody>
+      </p:sp>
+      <p:sp>
+        <p:nvSpPr>
+          <p:cNvPr id="9" name="Text 7"/>
+          <p:cNvSpPr/>
+          <p:nvPr/>
+        </p:nvSpPr>
+        <p:spPr>
+          <a:xfrm>
+            <a:off x="5715000" y="2011680"/>
+            <a:ext cx="5394960" cy="1371600"/>
+          </a:xfrm>
+          <a:prstGeom prst="rect">
+            <a:avLst/>
+          </a:prstGeom>
+          <a:noFill/>
+          <a:ln/>
+        </p:spPr>
+        <p:txBody>
+          <a:bodyPr wrap="square" lIns="0" tIns="0" rIns="0" bIns="0" rtlCol="0" anchor="ctr"/>
+          <a:lstStyle/>
+          <a:p>
+            <a:pPr indent="0" marL="0">
+              <a:lnSpc>
+                <a:spcPts val="2000"/>
+              </a:lnSpc>
+              <a:buNone/>
+            </a:pPr>
+            <a:r>
+              <a:rPr lang="en-US" sz="1300" dirty="0">
+                <a:solidFill>
+                  <a:srgbClr val="403B33"/>
+                </a:solidFill>
+                <a:latin typeface="Calibri" pitchFamily="34" charset="0"/>
+                <a:ea typeface="Calibri" pitchFamily="34" charset="-122"/>
+                <a:cs typeface="Calibri" pitchFamily="34" charset="-120"/>
+              </a:rPr>
+              <a:t>A domain and a server in India, the registration numbers entered, hours and fees confirmed, and reception trained on the manual. Start with two or three departments rather than all 21 — reception learns on a small volume and the rest open by ticking a box.</a:t>
+            </a:r>
+            <a:endParaRPr lang="en-US" sz="1300" dirty="0"/>
+          </a:p>
+        </p:txBody>
+      </p:sp>
+      <p:sp>
+        <p:nvSpPr>
+          <p:cNvPr id="10" name="Shape 8"/>
+          <p:cNvSpPr/>
+          <p:nvPr/>
+        </p:nvSpPr>
+        <p:spPr>
+          <a:xfrm>
+            <a:off x="685800" y="3886200"/>
+            <a:ext cx="10789920" cy="1874520"/>
+          </a:xfrm>
+          <a:prstGeom prst="roundRect">
+            <a:avLst>
+              <a:gd name="adj" fmla="val 3902"/>
+            </a:avLst>
+          </a:prstGeom>
+          <a:solidFill>
+            <a:srgbClr val="FFFFFF"/>
+          </a:solidFill>
+          <a:ln w="12700">
+            <a:solidFill>
+              <a:srgbClr val="E7E3D9"/>
+            </a:solidFill>
+            <a:prstDash val="solid"/>
+          </a:ln>
+        </p:spPr>
+      </p:sp>
+      <p:sp>
+        <p:nvSpPr>
+          <p:cNvPr id="11" name="Shape 9"/>
+          <p:cNvSpPr/>
+          <p:nvPr/>
+        </p:nvSpPr>
+        <p:spPr>
+          <a:xfrm>
+            <a:off x="1051560" y="4233672"/>
+            <a:ext cx="621792" cy="621792"/>
+          </a:xfrm>
+          <a:prstGeom prst="ellipse">
+            <a:avLst/>
+          </a:prstGeom>
+          <a:solidFill>
+            <a:srgbClr val="0E6A5C"/>
+          </a:solidFill>
+          <a:ln/>
+        </p:spPr>
+      </p:sp>
+      <p:sp>
+        <p:nvSpPr>
+          <p:cNvPr id="12" name="Text 10"/>
+          <p:cNvSpPr/>
+          <p:nvPr/>
+        </p:nvSpPr>
+        <p:spPr>
+          <a:xfrm>
+            <a:off x="1051560" y="4233672"/>
+            <a:ext cx="621792" cy="621792"/>
+          </a:xfrm>
+          <a:prstGeom prst="rect">
+            <a:avLst/>
+          </a:prstGeom>
+          <a:noFill/>
+          <a:ln/>
+        </p:spPr>
+        <p:txBody>
+          <a:bodyPr wrap="square" lIns="0" tIns="0" rIns="0" bIns="0" rtlCol="0" anchor="ctr"/>
+          <a:lstStyle/>
+          <a:p>
+            <a:pPr algn="ctr" indent="0" marL="0">
+              <a:buNone/>
+            </a:pPr>
+            <a:r>
+              <a:rPr lang="en-US" sz="1500" b="1" dirty="0">
+                <a:solidFill>
+                  <a:srgbClr val="FFFFFF"/>
+                </a:solidFill>
+                <a:latin typeface="Calibri" pitchFamily="34" charset="0"/>
+                <a:ea typeface="Calibri" pitchFamily="34" charset="-122"/>
+                <a:cs typeface="Calibri" pitchFamily="34" charset="-120"/>
+              </a:rPr>
+              <a:t>2</a:t>
+            </a:r>
+            <a:endParaRPr lang="en-US" sz="1500" dirty="0"/>
+          </a:p>
+        </p:txBody>
+      </p:sp>
+      <p:sp>
+        <p:nvSpPr>
+          <p:cNvPr id="13" name="Text 11"/>
+          <p:cNvSpPr/>
+          <p:nvPr/>
+        </p:nvSpPr>
+        <p:spPr>
+          <a:xfrm>
+            <a:off x="1920240" y="4160520"/>
+            <a:ext cx="3657600" cy="411480"/>
+          </a:xfrm>
+          <a:prstGeom prst="rect">
+            <a:avLst/>
+          </a:prstGeom>
+          <a:noFill/>
+          <a:ln/>
+        </p:spPr>
+        <p:txBody>
+          <a:bodyPr wrap="square" lIns="0" tIns="0" rIns="0" bIns="0" rtlCol="0" anchor="ctr"/>
+          <a:lstStyle/>
+          <a:p>
+            <a:pPr indent="0" marL="0">
+              <a:buNone/>
+            </a:pPr>
+            <a:r>
+              <a:rPr lang="en-US" sz="2400" b="1" dirty="0">
+                <a:solidFill>
+                  <a:srgbClr val="16130F"/>
+                </a:solidFill>
+                <a:latin typeface="Cambria" pitchFamily="34" charset="0"/>
+                <a:ea typeface="Cambria" pitchFamily="34" charset="-122"/>
+                <a:cs typeface="Cambria" pitchFamily="34" charset="-120"/>
+              </a:rPr>
+              <a:t>Remove the typing</a:t>
+            </a:r>
+            <a:endParaRPr lang="en-US" sz="2400" dirty="0"/>
+          </a:p>
+        </p:txBody>
+      </p:sp>
+      <p:sp>
+        <p:nvSpPr>
+          <p:cNvPr id="14" name="Text 12"/>
+          <p:cNvSpPr/>
+          <p:nvPr/>
+        </p:nvSpPr>
+        <p:spPr>
+          <a:xfrm>
+            <a:off x="1920240" y="4636008"/>
+            <a:ext cx="3657600" cy="320040"/>
+          </a:xfrm>
+          <a:prstGeom prst="rect">
+            <a:avLst/>
+          </a:prstGeom>
+          <a:noFill/>
+          <a:ln/>
+        </p:spPr>
+        <p:txBody>
+          <a:bodyPr wrap="square" lIns="0" tIns="0" rIns="0" bIns="0" rtlCol="0" anchor="ctr"/>
+          <a:lstStyle/>
+          <a:p>
+            <a:pPr indent="0" marL="0">
+              <a:buNone/>
+            </a:pPr>
+            <a:r>
+              <a:rPr lang="en-US" sz="1300" b="1" dirty="0">
+                <a:solidFill>
+                  <a:srgbClr val="0E6A5C"/>
+                </a:solidFill>
+                <a:latin typeface="Calibri" pitchFamily="34" charset="0"/>
+                <a:ea typeface="Calibri" pitchFamily="34" charset="-122"/>
+                <a:cs typeface="Calibri" pitchFamily="34" charset="-120"/>
+              </a:rPr>
+              <a:t>After Klinique replies</a:t>
+            </a:r>
+            <a:endParaRPr lang="en-US" sz="1300" dirty="0"/>
+          </a:p>
+        </p:txBody>
+      </p:sp>
+      <p:sp>
+        <p:nvSpPr>
+          <p:cNvPr id="15" name="Text 13"/>
+          <p:cNvSpPr/>
+          <p:nvPr/>
+        </p:nvSpPr>
+        <p:spPr>
+          <a:xfrm>
+            <a:off x="5715000" y="4160520"/>
+            <a:ext cx="5394960" cy="1371600"/>
+          </a:xfrm>
+          <a:prstGeom prst="rect">
+            <a:avLst/>
+          </a:prstGeom>
+          <a:noFill/>
+          <a:ln/>
+        </p:spPr>
+        <p:txBody>
+          <a:bodyPr wrap="square" lIns="0" tIns="0" rIns="0" bIns="0" rtlCol="0" anchor="ctr"/>
+          <a:lstStyle/>
+          <a:p>
+            <a:pPr indent="0" marL="0">
+              <a:lnSpc>
+                <a:spcPts val="2000"/>
+              </a:lnSpc>
+              <a:buNone/>
+            </a:pPr>
+            <a:r>
+              <a:rPr lang="en-US" sz="1300" dirty="0">
+                <a:solidFill>
+                  <a:srgbClr val="403B33"/>
+                </a:solidFill>
+                <a:latin typeface="Calibri" pitchFamily="34" charset="0"/>
+                <a:ea typeface="Calibri" pitchFamily="34" charset="-122"/>
+                <a:cs typeface="Calibri" pitchFamily="34" charset="-120"/>
+              </a:rPr>
+              <a:t>Bookings pass into Klinique by themselves instead of being copied across by hand. It needs either an access key from Klinique or one booking captured from their own form. Quoted separately, because it depends on what they will give us.</a:t>
+            </a:r>
+            <a:endParaRPr lang="en-US" sz="1300" dirty="0"/>
+          </a:p>
+        </p:txBody>
+      </p:sp>
+    </p:spTree>
+  </p:cSld>
+  <p:clrMapOvr>
+    <a:masterClrMapping/>
+  </p:clrMapOvr>
+</p:sld>
+</file>
+
+<file path=ppt/slides/slide14.xml><?xml version="1.0" encoding="utf-8"?>
+<p:sld xmlns:a="http://schemas.openxmlformats.org/drawingml/2006/main" xmlns:r="http://schemas.openxmlformats.org/officeDocument/2006/relationships" xmlns:p="http://schemas.openxmlformats.org/presentationml/2006/main">
+  <p:cSld name="Slide 14">
     <p:bg>
       <p:bgPr>
         <a:solidFill>
@@ -7646,7 +8889,7 @@
                 <a:ea typeface="Calibri" pitchFamily="34" charset="-122"/>
                 <a:cs typeface="Calibri" pitchFamily="34" charset="-120"/>
               </a:rPr>
-              <a:t>IN PLAIN WORDS</a:t>
+              <a:t>THE SAME THREE PIECES, WORKING</a:t>
             </a:r>
             <a:endParaRPr lang="en-US" sz="1100" dirty="0"/>
           </a:p>
@@ -7685,7 +8928,7 @@
                 <a:ea typeface="Cambria" pitchFamily="34" charset="-122"/>
                 <a:cs typeface="Cambria" pitchFamily="34" charset="-120"/>
               </a:rPr>
-              <a:t>What each piece actually is</a:t>
+              <a:t>Follow one booking, start to finish</a:t>
             </a:r>
             <a:endParaRPr lang="en-US" sz="3400" dirty="0"/>
           </a:p>
@@ -7699,12 +8942,12 @@
         </p:nvSpPr>
         <p:spPr>
           <a:xfrm>
-            <a:off x="685800" y="1737360"/>
-            <a:ext cx="10789920" cy="1188720"/>
+            <a:off x="685800" y="1691640"/>
+            <a:ext cx="5257800" cy="1115568"/>
           </a:xfrm>
           <a:prstGeom prst="roundRect">
             <a:avLst>
-              <a:gd name="adj" fmla="val 4615"/>
+              <a:gd name="adj" fmla="val 4918"/>
             </a:avLst>
           </a:prstGeom>
           <a:solidFill>
@@ -7720,42 +8963,23 @@
       </p:sp>
       <p:sp>
         <p:nvSpPr>
-          <p:cNvPr id="5" name="Text 3"/>
-          <p:cNvSpPr/>
-          <p:nvPr/>
-        </p:nvSpPr>
-        <p:spPr>
-          <a:xfrm>
-            <a:off x="1005840" y="1956816"/>
-            <a:ext cx="2377440" cy="457200"/>
-          </a:xfrm>
-          <a:prstGeom prst="rect">
-            <a:avLst/>
-          </a:prstGeom>
-          <a:noFill/>
-          <a:ln/>
-        </p:spPr>
-        <p:txBody>
-          <a:bodyPr wrap="square" lIns="0" tIns="0" rIns="0" bIns="0" rtlCol="0" anchor="ctr"/>
-          <a:lstStyle/>
-          <a:p>
-            <a:pPr indent="0" marL="0">
-              <a:buNone/>
-            </a:pPr>
-            <a:r>
-              <a:rPr lang="en-US" sz="2000" b="1" dirty="0">
-                <a:solidFill>
-                  <a:srgbClr val="0E6A5C"/>
-                </a:solidFill>
-                <a:latin typeface="Cambria" pitchFamily="34" charset="0"/>
-                <a:ea typeface="Cambria" pitchFamily="34" charset="-122"/>
-                <a:cs typeface="Cambria" pitchFamily="34" charset="-120"/>
-              </a:rPr>
-              <a:t>The website</a:t>
-            </a:r>
-            <a:endParaRPr lang="en-US" sz="2000" dirty="0"/>
-          </a:p>
-        </p:txBody>
+          <p:cNvPr id="5" name="Shape 3"/>
+          <p:cNvSpPr/>
+          <p:nvPr/>
+        </p:nvSpPr>
+        <p:spPr>
+          <a:xfrm>
+            <a:off x="941832" y="1947672"/>
+            <a:ext cx="402336" cy="402336"/>
+          </a:xfrm>
+          <a:prstGeom prst="ellipse">
+            <a:avLst/>
+          </a:prstGeom>
+          <a:solidFill>
+            <a:srgbClr val="0E6A5C"/>
+          </a:solidFill>
+          <a:ln/>
+        </p:spPr>
       </p:sp>
       <p:sp>
         <p:nvSpPr>
@@ -7765,8 +8989,86 @@
         </p:nvSpPr>
         <p:spPr>
           <a:xfrm>
-            <a:off x="3566160" y="1920240"/>
-            <a:ext cx="7589520" cy="868680"/>
+            <a:off x="941832" y="1947672"/>
+            <a:ext cx="402336" cy="402336"/>
+          </a:xfrm>
+          <a:prstGeom prst="rect">
+            <a:avLst/>
+          </a:prstGeom>
+          <a:noFill/>
+          <a:ln/>
+        </p:spPr>
+        <p:txBody>
+          <a:bodyPr wrap="square" lIns="0" tIns="0" rIns="0" bIns="0" rtlCol="0" anchor="ctr"/>
+          <a:lstStyle/>
+          <a:p>
+            <a:pPr algn="ctr" indent="0" marL="0">
+              <a:buNone/>
+            </a:pPr>
+            <a:r>
+              <a:rPr lang="en-US" sz="1500" b="1" dirty="0">
+                <a:solidFill>
+                  <a:srgbClr val="FFFFFF"/>
+                </a:solidFill>
+                <a:latin typeface="Calibri" pitchFamily="34" charset="0"/>
+                <a:ea typeface="Calibri" pitchFamily="34" charset="-122"/>
+                <a:cs typeface="Calibri" pitchFamily="34" charset="-120"/>
+              </a:rPr>
+              <a:t>1</a:t>
+            </a:r>
+            <a:endParaRPr lang="en-US" sz="1500" dirty="0"/>
+          </a:p>
+        </p:txBody>
+      </p:sp>
+      <p:sp>
+        <p:nvSpPr>
+          <p:cNvPr id="7" name="Text 5"/>
+          <p:cNvSpPr/>
+          <p:nvPr/>
+        </p:nvSpPr>
+        <p:spPr>
+          <a:xfrm>
+            <a:off x="1527048" y="1837944"/>
+            <a:ext cx="4206240" cy="274320"/>
+          </a:xfrm>
+          <a:prstGeom prst="rect">
+            <a:avLst/>
+          </a:prstGeom>
+          <a:noFill/>
+          <a:ln/>
+        </p:spPr>
+        <p:txBody>
+          <a:bodyPr wrap="square" lIns="0" tIns="0" rIns="0" bIns="0" rtlCol="0" anchor="ctr"/>
+          <a:lstStyle/>
+          <a:p>
+            <a:pPr indent="0" marL="0">
+              <a:buNone/>
+            </a:pPr>
+            <a:r>
+              <a:rPr lang="en-US" sz="1450" b="1" dirty="0">
+                <a:solidFill>
+                  <a:srgbClr val="16130F"/>
+                </a:solidFill>
+                <a:latin typeface="Calibri" pitchFamily="34" charset="0"/>
+                <a:ea typeface="Calibri" pitchFamily="34" charset="-122"/>
+                <a:cs typeface="Calibri" pitchFamily="34" charset="-120"/>
+              </a:rPr>
+              <a:t>11pm</a:t>
+            </a:r>
+            <a:endParaRPr lang="en-US" sz="1450" dirty="0"/>
+          </a:p>
+        </p:txBody>
+      </p:sp>
+      <p:sp>
+        <p:nvSpPr>
+          <p:cNvPr id="8" name="Text 6"/>
+          <p:cNvSpPr/>
+          <p:nvPr/>
+        </p:nvSpPr>
+        <p:spPr>
+          <a:xfrm>
+            <a:off x="1527048" y="2130552"/>
+            <a:ext cx="4206240" cy="621792"/>
           </a:xfrm>
           <a:prstGeom prst="rect">
             <a:avLst/>
@@ -7780,12 +9082,12 @@
           <a:p>
             <a:pPr indent="0" marL="0">
               <a:lnSpc>
-                <a:spcPts val="2100"/>
+                <a:spcPts val="1600"/>
               </a:lnSpc>
               <a:buNone/>
             </a:pPr>
             <a:r>
-              <a:rPr lang="en-US" sz="1350" dirty="0">
+              <a:rPr lang="en-US" sz="1150" dirty="0">
                 <a:solidFill>
                   <a:srgbClr val="403B33"/>
                 </a:solidFill>
@@ -7793,26 +9095,26 @@
                 <a:ea typeface="Calibri" pitchFamily="34" charset="-122"/>
                 <a:cs typeface="Calibri" pitchFamily="34" charset="-120"/>
               </a:rPr>
-              <a:t>Written with React. It is only pictures and words — it holds no records and cannot be trusted with any, because it runs on the patient’s own phone where anybody could change it.</a:t>
-            </a:r>
-            <a:endParaRPr lang="en-US" sz="1350" dirty="0"/>
-          </a:p>
-        </p:txBody>
-      </p:sp>
-      <p:sp>
-        <p:nvSpPr>
-          <p:cNvPr id="7" name="Shape 5"/>
-          <p:cNvSpPr/>
-          <p:nvPr/>
-        </p:nvSpPr>
-        <p:spPr>
-          <a:xfrm>
-            <a:off x="685800" y="3154680"/>
-            <a:ext cx="10789920" cy="1188720"/>
+              <a:t>A woman in Trichy opens the site on her phone. Her phone downloads the website — pictures, words and buttons. It holds no records at all.</a:t>
+            </a:r>
+            <a:endParaRPr lang="en-US" sz="1150" dirty="0"/>
+          </a:p>
+        </p:txBody>
+      </p:sp>
+      <p:sp>
+        <p:nvSpPr>
+          <p:cNvPr id="9" name="Shape 7"/>
+          <p:cNvSpPr/>
+          <p:nvPr/>
+        </p:nvSpPr>
+        <p:spPr>
+          <a:xfrm>
+            <a:off x="6217920" y="1691640"/>
+            <a:ext cx="5257800" cy="1115568"/>
           </a:xfrm>
           <a:prstGeom prst="roundRect">
             <a:avLst>
-              <a:gd name="adj" fmla="val 4615"/>
+              <a:gd name="adj" fmla="val 4918"/>
             </a:avLst>
           </a:prstGeom>
           <a:solidFill>
@@ -7828,53 +9130,112 @@
       </p:sp>
       <p:sp>
         <p:nvSpPr>
-          <p:cNvPr id="8" name="Text 6"/>
-          <p:cNvSpPr/>
-          <p:nvPr/>
-        </p:nvSpPr>
-        <p:spPr>
-          <a:xfrm>
-            <a:off x="1005840" y="3374136"/>
-            <a:ext cx="2377440" cy="457200"/>
-          </a:xfrm>
-          <a:prstGeom prst="rect">
-            <a:avLst/>
-          </a:prstGeom>
-          <a:noFill/>
-          <a:ln/>
-        </p:spPr>
-        <p:txBody>
-          <a:bodyPr wrap="square" lIns="0" tIns="0" rIns="0" bIns="0" rtlCol="0" anchor="ctr"/>
-          <a:lstStyle/>
-          <a:p>
-            <a:pPr indent="0" marL="0">
-              <a:buNone/>
-            </a:pPr>
-            <a:r>
-              <a:rPr lang="en-US" sz="2000" b="1" dirty="0">
-                <a:solidFill>
-                  <a:srgbClr val="0E6A5C"/>
-                </a:solidFill>
-                <a:latin typeface="Cambria" pitchFamily="34" charset="0"/>
-                <a:ea typeface="Cambria" pitchFamily="34" charset="-122"/>
-                <a:cs typeface="Cambria" pitchFamily="34" charset="-120"/>
-              </a:rPr>
-              <a:t>The server</a:t>
-            </a:r>
-            <a:endParaRPr lang="en-US" sz="2000" dirty="0"/>
-          </a:p>
-        </p:txBody>
-      </p:sp>
-      <p:sp>
-        <p:nvSpPr>
-          <p:cNvPr id="9" name="Text 7"/>
-          <p:cNvSpPr/>
-          <p:nvPr/>
-        </p:nvSpPr>
-        <p:spPr>
-          <a:xfrm>
-            <a:off x="3566160" y="3337560"/>
-            <a:ext cx="7589520" cy="868680"/>
+          <p:cNvPr id="10" name="Shape 8"/>
+          <p:cNvSpPr/>
+          <p:nvPr/>
+        </p:nvSpPr>
+        <p:spPr>
+          <a:xfrm>
+            <a:off x="6473952" y="1947672"/>
+            <a:ext cx="402336" cy="402336"/>
+          </a:xfrm>
+          <a:prstGeom prst="ellipse">
+            <a:avLst/>
+          </a:prstGeom>
+          <a:solidFill>
+            <a:srgbClr val="0E6A5C"/>
+          </a:solidFill>
+          <a:ln/>
+        </p:spPr>
+      </p:sp>
+      <p:sp>
+        <p:nvSpPr>
+          <p:cNvPr id="11" name="Text 9"/>
+          <p:cNvSpPr/>
+          <p:nvPr/>
+        </p:nvSpPr>
+        <p:spPr>
+          <a:xfrm>
+            <a:off x="6473952" y="1947672"/>
+            <a:ext cx="402336" cy="402336"/>
+          </a:xfrm>
+          <a:prstGeom prst="rect">
+            <a:avLst/>
+          </a:prstGeom>
+          <a:noFill/>
+          <a:ln/>
+        </p:spPr>
+        <p:txBody>
+          <a:bodyPr wrap="square" lIns="0" tIns="0" rIns="0" bIns="0" rtlCol="0" anchor="ctr"/>
+          <a:lstStyle/>
+          <a:p>
+            <a:pPr algn="ctr" indent="0" marL="0">
+              <a:buNone/>
+            </a:pPr>
+            <a:r>
+              <a:rPr lang="en-US" sz="1500" b="1" dirty="0">
+                <a:solidFill>
+                  <a:srgbClr val="FFFFFF"/>
+                </a:solidFill>
+                <a:latin typeface="Calibri" pitchFamily="34" charset="0"/>
+                <a:ea typeface="Calibri" pitchFamily="34" charset="-122"/>
+                <a:cs typeface="Calibri" pitchFamily="34" charset="-120"/>
+              </a:rPr>
+              <a:t>2</a:t>
+            </a:r>
+            <a:endParaRPr lang="en-US" sz="1500" dirty="0"/>
+          </a:p>
+        </p:txBody>
+      </p:sp>
+      <p:sp>
+        <p:nvSpPr>
+          <p:cNvPr id="12" name="Text 10"/>
+          <p:cNvSpPr/>
+          <p:nvPr/>
+        </p:nvSpPr>
+        <p:spPr>
+          <a:xfrm>
+            <a:off x="7059168" y="1837944"/>
+            <a:ext cx="4206240" cy="274320"/>
+          </a:xfrm>
+          <a:prstGeom prst="rect">
+            <a:avLst/>
+          </a:prstGeom>
+          <a:noFill/>
+          <a:ln/>
+        </p:spPr>
+        <p:txBody>
+          <a:bodyPr wrap="square" lIns="0" tIns="0" rIns="0" bIns="0" rtlCol="0" anchor="ctr"/>
+          <a:lstStyle/>
+          <a:p>
+            <a:pPr indent="0" marL="0">
+              <a:buNone/>
+            </a:pPr>
+            <a:r>
+              <a:rPr lang="en-US" sz="1450" b="1" dirty="0">
+                <a:solidFill>
+                  <a:srgbClr val="16130F"/>
+                </a:solidFill>
+                <a:latin typeface="Calibri" pitchFamily="34" charset="0"/>
+                <a:ea typeface="Calibri" pitchFamily="34" charset="-122"/>
+                <a:cs typeface="Calibri" pitchFamily="34" charset="-120"/>
+              </a:rPr>
+              <a:t>She taps Orthopaedics</a:t>
+            </a:r>
+            <a:endParaRPr lang="en-US" sz="1450" dirty="0"/>
+          </a:p>
+        </p:txBody>
+      </p:sp>
+      <p:sp>
+        <p:nvSpPr>
+          <p:cNvPr id="13" name="Text 11"/>
+          <p:cNvSpPr/>
+          <p:nvPr/>
+        </p:nvSpPr>
+        <p:spPr>
+          <a:xfrm>
+            <a:off x="7059168" y="2130552"/>
+            <a:ext cx="4206240" cy="621792"/>
           </a:xfrm>
           <a:prstGeom prst="rect">
             <a:avLst/>
@@ -7888,12 +9249,12 @@
           <a:p>
             <a:pPr indent="0" marL="0">
               <a:lnSpc>
-                <a:spcPts val="2100"/>
+                <a:spcPts val="1600"/>
               </a:lnSpc>
               <a:buNone/>
             </a:pPr>
             <a:r>
-              <a:rPr lang="en-US" sz="1350" dirty="0">
+              <a:rPr lang="en-US" sz="1150" dirty="0">
                 <a:solidFill>
                   <a:srgbClr val="403B33"/>
                 </a:solidFill>
@@ -7901,26 +9262,26 @@
                 <a:ea typeface="Calibri" pitchFamily="34" charset="-122"/>
                 <a:cs typeface="Calibri" pitchFamily="34" charset="-120"/>
               </a:rPr>
-              <a:t>Written with Node and Express. It is the only thing allowed to say yes. Every rule lives here: is that slot free, is that a real phone number, is this person staff.</a:t>
-            </a:r>
-            <a:endParaRPr lang="en-US" sz="1350" dirty="0"/>
-          </a:p>
-        </p:txBody>
-      </p:sp>
-      <p:sp>
-        <p:nvSpPr>
-          <p:cNvPr id="10" name="Shape 8"/>
-          <p:cNvSpPr/>
-          <p:nvPr/>
-        </p:nvSpPr>
-        <p:spPr>
-          <a:xfrm>
-            <a:off x="685800" y="4572000"/>
-            <a:ext cx="10789920" cy="1188720"/>
+              <a:t>Her phone cannot answer “which times is Dr Deepan free on Thursday?” by itself, so it asks the server.</a:t>
+            </a:r>
+            <a:endParaRPr lang="en-US" sz="1150" dirty="0"/>
+          </a:p>
+        </p:txBody>
+      </p:sp>
+      <p:sp>
+        <p:nvSpPr>
+          <p:cNvPr id="14" name="Shape 12"/>
+          <p:cNvSpPr/>
+          <p:nvPr/>
+        </p:nvSpPr>
+        <p:spPr>
+          <a:xfrm>
+            <a:off x="685800" y="2990088"/>
+            <a:ext cx="5257800" cy="1115568"/>
           </a:xfrm>
           <a:prstGeom prst="roundRect">
             <a:avLst>
-              <a:gd name="adj" fmla="val 4615"/>
+              <a:gd name="adj" fmla="val 4918"/>
             </a:avLst>
           </a:prstGeom>
           <a:solidFill>
@@ -7936,119 +9297,706 @@
       </p:sp>
       <p:sp>
         <p:nvSpPr>
-          <p:cNvPr id="11" name="Text 9"/>
-          <p:cNvSpPr/>
-          <p:nvPr/>
-        </p:nvSpPr>
-        <p:spPr>
-          <a:xfrm>
-            <a:off x="1005840" y="4791456"/>
-            <a:ext cx="2377440" cy="457200"/>
-          </a:xfrm>
-          <a:prstGeom prst="rect">
-            <a:avLst/>
-          </a:prstGeom>
-          <a:noFill/>
-          <a:ln/>
-        </p:spPr>
-        <p:txBody>
-          <a:bodyPr wrap="square" lIns="0" tIns="0" rIns="0" bIns="0" rtlCol="0" anchor="ctr"/>
-          <a:lstStyle/>
-          <a:p>
-            <a:pPr indent="0" marL="0">
-              <a:buNone/>
-            </a:pPr>
-            <a:r>
-              <a:rPr lang="en-US" sz="2000" b="1" dirty="0">
-                <a:solidFill>
-                  <a:srgbClr val="0E6A5C"/>
+          <p:cNvPr id="15" name="Shape 13"/>
+          <p:cNvSpPr/>
+          <p:nvPr/>
+        </p:nvSpPr>
+        <p:spPr>
+          <a:xfrm>
+            <a:off x="941832" y="3246120"/>
+            <a:ext cx="402336" cy="402336"/>
+          </a:xfrm>
+          <a:prstGeom prst="ellipse">
+            <a:avLst/>
+          </a:prstGeom>
+          <a:solidFill>
+            <a:srgbClr val="0E6A5C"/>
+          </a:solidFill>
+          <a:ln/>
+        </p:spPr>
+      </p:sp>
+      <p:sp>
+        <p:nvSpPr>
+          <p:cNvPr id="16" name="Text 14"/>
+          <p:cNvSpPr/>
+          <p:nvPr/>
+        </p:nvSpPr>
+        <p:spPr>
+          <a:xfrm>
+            <a:off x="941832" y="3246120"/>
+            <a:ext cx="402336" cy="402336"/>
+          </a:xfrm>
+          <a:prstGeom prst="rect">
+            <a:avLst/>
+          </a:prstGeom>
+          <a:noFill/>
+          <a:ln/>
+        </p:spPr>
+        <p:txBody>
+          <a:bodyPr wrap="square" lIns="0" tIns="0" rIns="0" bIns="0" rtlCol="0" anchor="ctr"/>
+          <a:lstStyle/>
+          <a:p>
+            <a:pPr algn="ctr" indent="0" marL="0">
+              <a:buNone/>
+            </a:pPr>
+            <a:r>
+              <a:rPr lang="en-US" sz="1500" b="1" dirty="0">
+                <a:solidFill>
+                  <a:srgbClr val="FFFFFF"/>
+                </a:solidFill>
+                <a:latin typeface="Calibri" pitchFamily="34" charset="0"/>
+                <a:ea typeface="Calibri" pitchFamily="34" charset="-122"/>
+                <a:cs typeface="Calibri" pitchFamily="34" charset="-120"/>
+              </a:rPr>
+              <a:t>3</a:t>
+            </a:r>
+            <a:endParaRPr lang="en-US" sz="1500" dirty="0"/>
+          </a:p>
+        </p:txBody>
+      </p:sp>
+      <p:sp>
+        <p:nvSpPr>
+          <p:cNvPr id="17" name="Text 15"/>
+          <p:cNvSpPr/>
+          <p:nvPr/>
+        </p:nvSpPr>
+        <p:spPr>
+          <a:xfrm>
+            <a:off x="1527048" y="3136392"/>
+            <a:ext cx="4206240" cy="274320"/>
+          </a:xfrm>
+          <a:prstGeom prst="rect">
+            <a:avLst/>
+          </a:prstGeom>
+          <a:noFill/>
+          <a:ln/>
+        </p:spPr>
+        <p:txBody>
+          <a:bodyPr wrap="square" lIns="0" tIns="0" rIns="0" bIns="0" rtlCol="0" anchor="ctr"/>
+          <a:lstStyle/>
+          <a:p>
+            <a:pPr indent="0" marL="0">
+              <a:buNone/>
+            </a:pPr>
+            <a:r>
+              <a:rPr lang="en-US" sz="1450" b="1" dirty="0">
+                <a:solidFill>
+                  <a:srgbClr val="16130F"/>
+                </a:solidFill>
+                <a:latin typeface="Calibri" pitchFamily="34" charset="0"/>
+                <a:ea typeface="Calibri" pitchFamily="34" charset="-122"/>
+                <a:cs typeface="Calibri" pitchFamily="34" charset="-120"/>
+              </a:rPr>
+              <a:t>The server looks in the diary</a:t>
+            </a:r>
+            <a:endParaRPr lang="en-US" sz="1450" dirty="0"/>
+          </a:p>
+        </p:txBody>
+      </p:sp>
+      <p:sp>
+        <p:nvSpPr>
+          <p:cNvPr id="18" name="Text 16"/>
+          <p:cNvSpPr/>
+          <p:nvPr/>
+        </p:nvSpPr>
+        <p:spPr>
+          <a:xfrm>
+            <a:off x="1527048" y="3429000"/>
+            <a:ext cx="4206240" cy="621792"/>
+          </a:xfrm>
+          <a:prstGeom prst="rect">
+            <a:avLst/>
+          </a:prstGeom>
+          <a:noFill/>
+          <a:ln/>
+        </p:spPr>
+        <p:txBody>
+          <a:bodyPr wrap="square" lIns="0" tIns="0" rIns="0" bIns="0" rtlCol="0" anchor="ctr"/>
+          <a:lstStyle/>
+          <a:p>
+            <a:pPr indent="0" marL="0">
+              <a:lnSpc>
+                <a:spcPts val="1600"/>
+              </a:lnSpc>
+              <a:buNone/>
+            </a:pPr>
+            <a:r>
+              <a:rPr lang="en-US" sz="1150" dirty="0">
+                <a:solidFill>
+                  <a:srgbClr val="403B33"/>
+                </a:solidFill>
+                <a:latin typeface="Calibri" pitchFamily="34" charset="0"/>
+                <a:ea typeface="Calibri" pitchFamily="34" charset="-122"/>
+                <a:cs typeface="Calibri" pitchFamily="34" charset="-120"/>
+              </a:rPr>
+              <a:t>It finds the free twenty-minute slots for that doctor on that day and sends the list back.</a:t>
+            </a:r>
+            <a:endParaRPr lang="en-US" sz="1150" dirty="0"/>
+          </a:p>
+        </p:txBody>
+      </p:sp>
+      <p:sp>
+        <p:nvSpPr>
+          <p:cNvPr id="19" name="Shape 17"/>
+          <p:cNvSpPr/>
+          <p:nvPr/>
+        </p:nvSpPr>
+        <p:spPr>
+          <a:xfrm>
+            <a:off x="6217920" y="2990088"/>
+            <a:ext cx="5257800" cy="1115568"/>
+          </a:xfrm>
+          <a:prstGeom prst="roundRect">
+            <a:avLst>
+              <a:gd name="adj" fmla="val 4918"/>
+            </a:avLst>
+          </a:prstGeom>
+          <a:solidFill>
+            <a:srgbClr val="FFFFFF"/>
+          </a:solidFill>
+          <a:ln w="12700">
+            <a:solidFill>
+              <a:srgbClr val="E7E3D9"/>
+            </a:solidFill>
+            <a:prstDash val="solid"/>
+          </a:ln>
+        </p:spPr>
+      </p:sp>
+      <p:sp>
+        <p:nvSpPr>
+          <p:cNvPr id="20" name="Shape 18"/>
+          <p:cNvSpPr/>
+          <p:nvPr/>
+        </p:nvSpPr>
+        <p:spPr>
+          <a:xfrm>
+            <a:off x="6473952" y="3246120"/>
+            <a:ext cx="402336" cy="402336"/>
+          </a:xfrm>
+          <a:prstGeom prst="ellipse">
+            <a:avLst/>
+          </a:prstGeom>
+          <a:solidFill>
+            <a:srgbClr val="0E6A5C"/>
+          </a:solidFill>
+          <a:ln/>
+        </p:spPr>
+      </p:sp>
+      <p:sp>
+        <p:nvSpPr>
+          <p:cNvPr id="21" name="Text 19"/>
+          <p:cNvSpPr/>
+          <p:nvPr/>
+        </p:nvSpPr>
+        <p:spPr>
+          <a:xfrm>
+            <a:off x="6473952" y="3246120"/>
+            <a:ext cx="402336" cy="402336"/>
+          </a:xfrm>
+          <a:prstGeom prst="rect">
+            <a:avLst/>
+          </a:prstGeom>
+          <a:noFill/>
+          <a:ln/>
+        </p:spPr>
+        <p:txBody>
+          <a:bodyPr wrap="square" lIns="0" tIns="0" rIns="0" bIns="0" rtlCol="0" anchor="ctr"/>
+          <a:lstStyle/>
+          <a:p>
+            <a:pPr algn="ctr" indent="0" marL="0">
+              <a:buNone/>
+            </a:pPr>
+            <a:r>
+              <a:rPr lang="en-US" sz="1500" b="1" dirty="0">
+                <a:solidFill>
+                  <a:srgbClr val="FFFFFF"/>
+                </a:solidFill>
+                <a:latin typeface="Calibri" pitchFamily="34" charset="0"/>
+                <a:ea typeface="Calibri" pitchFamily="34" charset="-122"/>
+                <a:cs typeface="Calibri" pitchFamily="34" charset="-120"/>
+              </a:rPr>
+              <a:t>4</a:t>
+            </a:r>
+            <a:endParaRPr lang="en-US" sz="1500" dirty="0"/>
+          </a:p>
+        </p:txBody>
+      </p:sp>
+      <p:sp>
+        <p:nvSpPr>
+          <p:cNvPr id="22" name="Text 20"/>
+          <p:cNvSpPr/>
+          <p:nvPr/>
+        </p:nvSpPr>
+        <p:spPr>
+          <a:xfrm>
+            <a:off x="7059168" y="3136392"/>
+            <a:ext cx="4206240" cy="274320"/>
+          </a:xfrm>
+          <a:prstGeom prst="rect">
+            <a:avLst/>
+          </a:prstGeom>
+          <a:noFill/>
+          <a:ln/>
+        </p:spPr>
+        <p:txBody>
+          <a:bodyPr wrap="square" lIns="0" tIns="0" rIns="0" bIns="0" rtlCol="0" anchor="ctr"/>
+          <a:lstStyle/>
+          <a:p>
+            <a:pPr indent="0" marL="0">
+              <a:buNone/>
+            </a:pPr>
+            <a:r>
+              <a:rPr lang="en-US" sz="1450" b="1" dirty="0">
+                <a:solidFill>
+                  <a:srgbClr val="16130F"/>
+                </a:solidFill>
+                <a:latin typeface="Calibri" pitchFamily="34" charset="0"/>
+                <a:ea typeface="Calibri" pitchFamily="34" charset="-122"/>
+                <a:cs typeface="Calibri" pitchFamily="34" charset="-120"/>
+              </a:rPr>
+              <a:t>She picks 10:30</a:t>
+            </a:r>
+            <a:endParaRPr lang="en-US" sz="1450" dirty="0"/>
+          </a:p>
+        </p:txBody>
+      </p:sp>
+      <p:sp>
+        <p:nvSpPr>
+          <p:cNvPr id="23" name="Text 21"/>
+          <p:cNvSpPr/>
+          <p:nvPr/>
+        </p:nvSpPr>
+        <p:spPr>
+          <a:xfrm>
+            <a:off x="7059168" y="3429000"/>
+            <a:ext cx="4206240" cy="621792"/>
+          </a:xfrm>
+          <a:prstGeom prst="rect">
+            <a:avLst/>
+          </a:prstGeom>
+          <a:noFill/>
+          <a:ln/>
+        </p:spPr>
+        <p:txBody>
+          <a:bodyPr wrap="square" lIns="0" tIns="0" rIns="0" bIns="0" rtlCol="0" anchor="ctr"/>
+          <a:lstStyle/>
+          <a:p>
+            <a:pPr indent="0" marL="0">
+              <a:lnSpc>
+                <a:spcPts val="1600"/>
+              </a:lnSpc>
+              <a:buNone/>
+            </a:pPr>
+            <a:r>
+              <a:rPr lang="en-US" sz="1150" dirty="0">
+                <a:solidFill>
+                  <a:srgbClr val="403B33"/>
+                </a:solidFill>
+                <a:latin typeface="Calibri" pitchFamily="34" charset="0"/>
+                <a:ea typeface="Calibri" pitchFamily="34" charset="-122"/>
+                <a:cs typeface="Calibri" pitchFamily="34" charset="-120"/>
+              </a:rPr>
+              <a:t>She types her name, age, number and reason, and presses Hold this slot.</a:t>
+            </a:r>
+            <a:endParaRPr lang="en-US" sz="1150" dirty="0"/>
+          </a:p>
+        </p:txBody>
+      </p:sp>
+      <p:sp>
+        <p:nvSpPr>
+          <p:cNvPr id="24" name="Shape 22"/>
+          <p:cNvSpPr/>
+          <p:nvPr/>
+        </p:nvSpPr>
+        <p:spPr>
+          <a:xfrm>
+            <a:off x="685800" y="4288536"/>
+            <a:ext cx="5257800" cy="1115568"/>
+          </a:xfrm>
+          <a:prstGeom prst="roundRect">
+            <a:avLst>
+              <a:gd name="adj" fmla="val 4918"/>
+            </a:avLst>
+          </a:prstGeom>
+          <a:solidFill>
+            <a:srgbClr val="FFFFFF"/>
+          </a:solidFill>
+          <a:ln w="12700">
+            <a:solidFill>
+              <a:srgbClr val="E7E3D9"/>
+            </a:solidFill>
+            <a:prstDash val="solid"/>
+          </a:ln>
+        </p:spPr>
+      </p:sp>
+      <p:sp>
+        <p:nvSpPr>
+          <p:cNvPr id="25" name="Shape 23"/>
+          <p:cNvSpPr/>
+          <p:nvPr/>
+        </p:nvSpPr>
+        <p:spPr>
+          <a:xfrm>
+            <a:off x="941832" y="4544568"/>
+            <a:ext cx="402336" cy="402336"/>
+          </a:xfrm>
+          <a:prstGeom prst="ellipse">
+            <a:avLst/>
+          </a:prstGeom>
+          <a:solidFill>
+            <a:srgbClr val="0E6A5C"/>
+          </a:solidFill>
+          <a:ln/>
+        </p:spPr>
+      </p:sp>
+      <p:sp>
+        <p:nvSpPr>
+          <p:cNvPr id="26" name="Text 24"/>
+          <p:cNvSpPr/>
+          <p:nvPr/>
+        </p:nvSpPr>
+        <p:spPr>
+          <a:xfrm>
+            <a:off x="941832" y="4544568"/>
+            <a:ext cx="402336" cy="402336"/>
+          </a:xfrm>
+          <a:prstGeom prst="rect">
+            <a:avLst/>
+          </a:prstGeom>
+          <a:noFill/>
+          <a:ln/>
+        </p:spPr>
+        <p:txBody>
+          <a:bodyPr wrap="square" lIns="0" tIns="0" rIns="0" bIns="0" rtlCol="0" anchor="ctr"/>
+          <a:lstStyle/>
+          <a:p>
+            <a:pPr algn="ctr" indent="0" marL="0">
+              <a:buNone/>
+            </a:pPr>
+            <a:r>
+              <a:rPr lang="en-US" sz="1500" b="1" dirty="0">
+                <a:solidFill>
+                  <a:srgbClr val="FFFFFF"/>
+                </a:solidFill>
+                <a:latin typeface="Calibri" pitchFamily="34" charset="0"/>
+                <a:ea typeface="Calibri" pitchFamily="34" charset="-122"/>
+                <a:cs typeface="Calibri" pitchFamily="34" charset="-120"/>
+              </a:rPr>
+              <a:t>5</a:t>
+            </a:r>
+            <a:endParaRPr lang="en-US" sz="1500" dirty="0"/>
+          </a:p>
+        </p:txBody>
+      </p:sp>
+      <p:sp>
+        <p:nvSpPr>
+          <p:cNvPr id="27" name="Text 25"/>
+          <p:cNvSpPr/>
+          <p:nvPr/>
+        </p:nvSpPr>
+        <p:spPr>
+          <a:xfrm>
+            <a:off x="1527048" y="4434840"/>
+            <a:ext cx="4206240" cy="274320"/>
+          </a:xfrm>
+          <a:prstGeom prst="rect">
+            <a:avLst/>
+          </a:prstGeom>
+          <a:noFill/>
+          <a:ln/>
+        </p:spPr>
+        <p:txBody>
+          <a:bodyPr wrap="square" lIns="0" tIns="0" rIns="0" bIns="0" rtlCol="0" anchor="ctr"/>
+          <a:lstStyle/>
+          <a:p>
+            <a:pPr indent="0" marL="0">
+              <a:buNone/>
+            </a:pPr>
+            <a:r>
+              <a:rPr lang="en-US" sz="1450" b="1" dirty="0">
+                <a:solidFill>
+                  <a:srgbClr val="16130F"/>
+                </a:solidFill>
+                <a:latin typeface="Calibri" pitchFamily="34" charset="0"/>
+                <a:ea typeface="Calibri" pitchFamily="34" charset="-122"/>
+                <a:cs typeface="Calibri" pitchFamily="34" charset="-120"/>
+              </a:rPr>
+              <a:t>The server checks again</a:t>
+            </a:r>
+            <a:endParaRPr lang="en-US" sz="1450" dirty="0"/>
+          </a:p>
+        </p:txBody>
+      </p:sp>
+      <p:sp>
+        <p:nvSpPr>
+          <p:cNvPr id="28" name="Text 26"/>
+          <p:cNvSpPr/>
+          <p:nvPr/>
+        </p:nvSpPr>
+        <p:spPr>
+          <a:xfrm>
+            <a:off x="1527048" y="4727448"/>
+            <a:ext cx="4206240" cy="621792"/>
+          </a:xfrm>
+          <a:prstGeom prst="rect">
+            <a:avLst/>
+          </a:prstGeom>
+          <a:noFill/>
+          <a:ln/>
+        </p:spPr>
+        <p:txBody>
+          <a:bodyPr wrap="square" lIns="0" tIns="0" rIns="0" bIns="0" rtlCol="0" anchor="ctr"/>
+          <a:lstStyle/>
+          <a:p>
+            <a:pPr indent="0" marL="0">
+              <a:lnSpc>
+                <a:spcPts val="1600"/>
+              </a:lnSpc>
+              <a:buNone/>
+            </a:pPr>
+            <a:r>
+              <a:rPr lang="en-US" sz="1150" dirty="0">
+                <a:solidFill>
+                  <a:srgbClr val="403B33"/>
+                </a:solidFill>
+                <a:latin typeface="Calibri" pitchFamily="34" charset="0"/>
+                <a:ea typeface="Calibri" pitchFamily="34" charset="-122"/>
+                <a:cs typeface="Calibri" pitchFamily="34" charset="-120"/>
+              </a:rPr>
+              <a:t>Is that slot still free, is that a real ten-digit number. Only then does it write the booking down and send back a reference — DH-WEB01.</a:t>
+            </a:r>
+            <a:endParaRPr lang="en-US" sz="1150" dirty="0"/>
+          </a:p>
+        </p:txBody>
+      </p:sp>
+      <p:sp>
+        <p:nvSpPr>
+          <p:cNvPr id="29" name="Shape 27"/>
+          <p:cNvSpPr/>
+          <p:nvPr/>
+        </p:nvSpPr>
+        <p:spPr>
+          <a:xfrm>
+            <a:off x="6217920" y="4288536"/>
+            <a:ext cx="5257800" cy="1115568"/>
+          </a:xfrm>
+          <a:prstGeom prst="roundRect">
+            <a:avLst>
+              <a:gd name="adj" fmla="val 4918"/>
+            </a:avLst>
+          </a:prstGeom>
+          <a:solidFill>
+            <a:srgbClr val="FFFFFF"/>
+          </a:solidFill>
+          <a:ln w="12700">
+            <a:solidFill>
+              <a:srgbClr val="E7E3D9"/>
+            </a:solidFill>
+            <a:prstDash val="solid"/>
+          </a:ln>
+        </p:spPr>
+      </p:sp>
+      <p:sp>
+        <p:nvSpPr>
+          <p:cNvPr id="30" name="Shape 28"/>
+          <p:cNvSpPr/>
+          <p:nvPr/>
+        </p:nvSpPr>
+        <p:spPr>
+          <a:xfrm>
+            <a:off x="6473952" y="4544568"/>
+            <a:ext cx="402336" cy="402336"/>
+          </a:xfrm>
+          <a:prstGeom prst="ellipse">
+            <a:avLst/>
+          </a:prstGeom>
+          <a:solidFill>
+            <a:srgbClr val="0E6A5C"/>
+          </a:solidFill>
+          <a:ln/>
+        </p:spPr>
+      </p:sp>
+      <p:sp>
+        <p:nvSpPr>
+          <p:cNvPr id="31" name="Text 29"/>
+          <p:cNvSpPr/>
+          <p:nvPr/>
+        </p:nvSpPr>
+        <p:spPr>
+          <a:xfrm>
+            <a:off x="6473952" y="4544568"/>
+            <a:ext cx="402336" cy="402336"/>
+          </a:xfrm>
+          <a:prstGeom prst="rect">
+            <a:avLst/>
+          </a:prstGeom>
+          <a:noFill/>
+          <a:ln/>
+        </p:spPr>
+        <p:txBody>
+          <a:bodyPr wrap="square" lIns="0" tIns="0" rIns="0" bIns="0" rtlCol="0" anchor="ctr"/>
+          <a:lstStyle/>
+          <a:p>
+            <a:pPr algn="ctr" indent="0" marL="0">
+              <a:buNone/>
+            </a:pPr>
+            <a:r>
+              <a:rPr lang="en-US" sz="1500" b="1" dirty="0">
+                <a:solidFill>
+                  <a:srgbClr val="FFFFFF"/>
+                </a:solidFill>
+                <a:latin typeface="Calibri" pitchFamily="34" charset="0"/>
+                <a:ea typeface="Calibri" pitchFamily="34" charset="-122"/>
+                <a:cs typeface="Calibri" pitchFamily="34" charset="-120"/>
+              </a:rPr>
+              <a:t>6</a:t>
+            </a:r>
+            <a:endParaRPr lang="en-US" sz="1500" dirty="0"/>
+          </a:p>
+        </p:txBody>
+      </p:sp>
+      <p:sp>
+        <p:nvSpPr>
+          <p:cNvPr id="32" name="Text 30"/>
+          <p:cNvSpPr/>
+          <p:nvPr/>
+        </p:nvSpPr>
+        <p:spPr>
+          <a:xfrm>
+            <a:off x="7059168" y="4434840"/>
+            <a:ext cx="4206240" cy="274320"/>
+          </a:xfrm>
+          <a:prstGeom prst="rect">
+            <a:avLst/>
+          </a:prstGeom>
+          <a:noFill/>
+          <a:ln/>
+        </p:spPr>
+        <p:txBody>
+          <a:bodyPr wrap="square" lIns="0" tIns="0" rIns="0" bIns="0" rtlCol="0" anchor="ctr"/>
+          <a:lstStyle/>
+          <a:p>
+            <a:pPr indent="0" marL="0">
+              <a:buNone/>
+            </a:pPr>
+            <a:r>
+              <a:rPr lang="en-US" sz="1450" b="1" dirty="0">
+                <a:solidFill>
+                  <a:srgbClr val="16130F"/>
+                </a:solidFill>
+                <a:latin typeface="Calibri" pitchFamily="34" charset="0"/>
+                <a:ea typeface="Calibri" pitchFamily="34" charset="-122"/>
+                <a:cs typeface="Calibri" pitchFamily="34" charset="-120"/>
+              </a:rPr>
+              <a:t>A chime sounds at reception</a:t>
+            </a:r>
+            <a:endParaRPr lang="en-US" sz="1450" dirty="0"/>
+          </a:p>
+        </p:txBody>
+      </p:sp>
+      <p:sp>
+        <p:nvSpPr>
+          <p:cNvPr id="33" name="Text 31"/>
+          <p:cNvSpPr/>
+          <p:nvPr/>
+        </p:nvSpPr>
+        <p:spPr>
+          <a:xfrm>
+            <a:off x="7059168" y="4727448"/>
+            <a:ext cx="4206240" cy="621792"/>
+          </a:xfrm>
+          <a:prstGeom prst="rect">
+            <a:avLst/>
+          </a:prstGeom>
+          <a:noFill/>
+          <a:ln/>
+        </p:spPr>
+        <p:txBody>
+          <a:bodyPr wrap="square" lIns="0" tIns="0" rIns="0" bIns="0" rtlCol="0" anchor="ctr"/>
+          <a:lstStyle/>
+          <a:p>
+            <a:pPr indent="0" marL="0">
+              <a:lnSpc>
+                <a:spcPts val="1600"/>
+              </a:lnSpc>
+              <a:buNone/>
+            </a:pPr>
+            <a:r>
+              <a:rPr lang="en-US" sz="1150" dirty="0">
+                <a:solidFill>
+                  <a:srgbClr val="403B33"/>
+                </a:solidFill>
+                <a:latin typeface="Calibri" pitchFamily="34" charset="0"/>
+                <a:ea typeface="Calibri" pitchFamily="34" charset="-122"/>
+                <a:cs typeface="Calibri" pitchFamily="34" charset="-120"/>
+              </a:rPr>
+              <a:t>The booking is on their screen. Nobody typed it, and it took her under a minute.</a:t>
+            </a:r>
+            <a:endParaRPr lang="en-US" sz="1150" dirty="0"/>
+          </a:p>
+        </p:txBody>
+      </p:sp>
+      <p:sp>
+        <p:nvSpPr>
+          <p:cNvPr id="34" name="Shape 32"/>
+          <p:cNvSpPr/>
+          <p:nvPr/>
+        </p:nvSpPr>
+        <p:spPr>
+          <a:xfrm>
+            <a:off x="685800" y="5669280"/>
+            <a:ext cx="10789920" cy="777240"/>
+          </a:xfrm>
+          <a:prstGeom prst="roundRect">
+            <a:avLst>
+              <a:gd name="adj" fmla="val 7059"/>
+            </a:avLst>
+          </a:prstGeom>
+          <a:solidFill>
+            <a:srgbClr val="052B26"/>
+          </a:solidFill>
+          <a:ln w="12700">
+            <a:solidFill>
+              <a:srgbClr val="052B26"/>
+            </a:solidFill>
+            <a:prstDash val="solid"/>
+          </a:ln>
+        </p:spPr>
+      </p:sp>
+      <p:sp>
+        <p:nvSpPr>
+          <p:cNvPr id="35" name="Text 33"/>
+          <p:cNvSpPr/>
+          <p:nvPr/>
+        </p:nvSpPr>
+        <p:spPr>
+          <a:xfrm>
+            <a:off x="1051560" y="5806440"/>
+            <a:ext cx="10058400" cy="502920"/>
+          </a:xfrm>
+          <a:prstGeom prst="rect">
+            <a:avLst/>
+          </a:prstGeom>
+          <a:noFill/>
+          <a:ln/>
+        </p:spPr>
+        <p:txBody>
+          <a:bodyPr wrap="square" lIns="0" tIns="0" rIns="0" bIns="0" rtlCol="0" anchor="ctr"/>
+          <a:lstStyle/>
+          <a:p>
+            <a:pPr algn="ctr" indent="0" marL="0">
+              <a:buNone/>
+            </a:pPr>
+            <a:r>
+              <a:rPr lang="en-US" sz="1400" i="1" dirty="0">
+                <a:solidFill>
+                  <a:srgbClr val="FFFFFF"/>
                 </a:solidFill>
                 <a:latin typeface="Cambria" pitchFamily="34" charset="0"/>
                 <a:ea typeface="Cambria" pitchFamily="34" charset="-122"/>
                 <a:cs typeface="Cambria" pitchFamily="34" charset="-120"/>
               </a:rPr>
-              <a:t>The database</a:t>
-            </a:r>
-            <a:endParaRPr lang="en-US" sz="2000" dirty="0"/>
-          </a:p>
-        </p:txBody>
-      </p:sp>
-      <p:sp>
-        <p:nvSpPr>
-          <p:cNvPr id="12" name="Text 10"/>
-          <p:cNvSpPr/>
-          <p:nvPr/>
-        </p:nvSpPr>
-        <p:spPr>
-          <a:xfrm>
-            <a:off x="3566160" y="4754880"/>
-            <a:ext cx="7589520" cy="868680"/>
-          </a:xfrm>
-          <a:prstGeom prst="rect">
-            <a:avLst/>
-          </a:prstGeom>
-          <a:noFill/>
-          <a:ln/>
-        </p:spPr>
-        <p:txBody>
-          <a:bodyPr wrap="square" lIns="0" tIns="0" rIns="0" bIns="0" rtlCol="0" anchor="ctr"/>
-          <a:lstStyle/>
-          <a:p>
-            <a:pPr indent="0" marL="0">
-              <a:lnSpc>
-                <a:spcPts val="2100"/>
-              </a:lnSpc>
-              <a:buNone/>
-            </a:pPr>
-            <a:r>
-              <a:rPr lang="en-US" sz="1350" dirty="0">
-                <a:solidFill>
-                  <a:srgbClr val="403B33"/>
-                </a:solidFill>
-                <a:latin typeface="Calibri" pitchFamily="34" charset="0"/>
-                <a:ea typeface="Calibri" pitchFamily="34" charset="-122"/>
-                <a:cs typeface="Calibri" pitchFamily="34" charset="-120"/>
-              </a:rPr>
-              <a:t>SQLite — a single file on the server’s disk. Small, fast, and nothing extra to pay for or run. It is copied automatically every six hours.</a:t>
-            </a:r>
-            <a:endParaRPr lang="en-US" sz="1350" dirty="0"/>
-          </a:p>
-        </p:txBody>
-      </p:sp>
-      <p:sp>
-        <p:nvSpPr>
-          <p:cNvPr id="13" name="Text 11"/>
-          <p:cNvSpPr/>
-          <p:nvPr/>
-        </p:nvSpPr>
-        <p:spPr>
-          <a:xfrm>
-            <a:off x="685800" y="5852160"/>
-            <a:ext cx="10789920" cy="457200"/>
-          </a:xfrm>
-          <a:prstGeom prst="rect">
-            <a:avLst/>
-          </a:prstGeom>
-          <a:noFill/>
-          <a:ln/>
-        </p:spPr>
-        <p:txBody>
-          <a:bodyPr wrap="square" lIns="0" tIns="0" rIns="0" bIns="0" rtlCol="0" anchor="ctr"/>
-          <a:lstStyle/>
-          <a:p>
-            <a:pPr indent="0" marL="0">
-              <a:buNone/>
-            </a:pPr>
-            <a:r>
-              <a:rPr lang="en-US" sz="1400" i="1" dirty="0">
-                <a:solidFill>
-                  <a:srgbClr val="706B5E"/>
-                </a:solidFill>
-                <a:latin typeface="Calibri" pitchFamily="34" charset="0"/>
-                <a:ea typeface="Calibri" pitchFamily="34" charset="-122"/>
-                <a:cs typeface="Calibri" pitchFamily="34" charset="-120"/>
-              </a:rPr>
-              <a:t>All three are free and open source. There is no licence to renew and no company that can raise a price later — adding the 26th doctor costs nothing.</a:t>
+              <a:t>The diary itself refuses two bookings for the same doctor at the same minute — so even two people tapping in the same second cannot double-book.</a:t>
             </a:r>
             <a:endParaRPr lang="en-US" sz="1400" dirty="0"/>
           </a:p>
@@ -8119,7 +10067,7 @@
                 <a:ea typeface="Calibri" pitchFamily="34" charset="-122"/>
                 <a:cs typeface="Calibri" pitchFamily="34" charset="-120"/>
               </a:rPr>
-              <a:t>THE DATA</a:t>
+              <a:t>IN PLAIN WORDS</a:t>
             </a:r>
             <a:endParaRPr lang="en-US" sz="1100" dirty="0"/>
           </a:p>
@@ -8158,7 +10106,7 @@
                 <a:ea typeface="Cambria" pitchFamily="34" charset="-122"/>
                 <a:cs typeface="Cambria" pitchFamily="34" charset="-120"/>
               </a:rPr>
-              <a:t>Where the records live, and who can reach them</a:t>
+              <a:t>What each piece actually is</a:t>
             </a:r>
             <a:endParaRPr lang="en-US" sz="3400" dirty="0"/>
           </a:p>
@@ -8173,15 +10121,15 @@
         <p:spPr>
           <a:xfrm>
             <a:off x="685800" y="1737360"/>
-            <a:ext cx="5257800" cy="1783080"/>
+            <a:ext cx="10789920" cy="1188720"/>
           </a:xfrm>
           <a:prstGeom prst="roundRect">
             <a:avLst>
-              <a:gd name="adj" fmla="val 4103"/>
+              <a:gd name="adj" fmla="val 4615"/>
             </a:avLst>
           </a:prstGeom>
           <a:solidFill>
-            <a:srgbClr val="F4F2EC"/>
+            <a:srgbClr val="FFFFFF"/>
           </a:solidFill>
           <a:ln w="12700">
             <a:solidFill>
@@ -8199,34 +10147,34 @@
         </p:nvSpPr>
         <p:spPr>
           <a:xfrm>
-            <a:off x="1005840" y="1965960"/>
-            <a:ext cx="4617720" cy="365760"/>
-          </a:xfrm>
-          <a:prstGeom prst="rect">
-            <a:avLst/>
-          </a:prstGeom>
-          <a:noFill/>
-          <a:ln/>
-        </p:spPr>
-        <p:txBody>
-          <a:bodyPr wrap="square" lIns="0" tIns="0" rIns="0" bIns="0" rtlCol="0" anchor="ctr"/>
-          <a:lstStyle/>
-          <a:p>
-            <a:pPr indent="0" marL="0">
-              <a:buNone/>
-            </a:pPr>
-            <a:r>
-              <a:rPr lang="en-US" sz="1800" b="1" dirty="0">
-                <a:solidFill>
-                  <a:srgbClr val="16130F"/>
+            <a:off x="1005840" y="1956816"/>
+            <a:ext cx="2377440" cy="457200"/>
+          </a:xfrm>
+          <a:prstGeom prst="rect">
+            <a:avLst/>
+          </a:prstGeom>
+          <a:noFill/>
+          <a:ln/>
+        </p:spPr>
+        <p:txBody>
+          <a:bodyPr wrap="square" lIns="0" tIns="0" rIns="0" bIns="0" rtlCol="0" anchor="ctr"/>
+          <a:lstStyle/>
+          <a:p>
+            <a:pPr indent="0" marL="0">
+              <a:buNone/>
+            </a:pPr>
+            <a:r>
+              <a:rPr lang="en-US" sz="2000" b="1" dirty="0">
+                <a:solidFill>
+                  <a:srgbClr val="0E6A5C"/>
                 </a:solidFill>
                 <a:latin typeface="Cambria" pitchFamily="34" charset="0"/>
                 <a:ea typeface="Cambria" pitchFamily="34" charset="-122"/>
                 <a:cs typeface="Cambria" pitchFamily="34" charset="-120"/>
               </a:rPr>
-              <a:t>Inside India</a:t>
-            </a:r>
-            <a:endParaRPr lang="en-US" sz="1800" dirty="0"/>
+              <a:t>The website</a:t>
+            </a:r>
+            <a:endParaRPr lang="en-US" sz="2000" dirty="0"/>
           </a:p>
         </p:txBody>
       </p:sp>
@@ -8238,8 +10186,8 @@
         </p:nvSpPr>
         <p:spPr>
           <a:xfrm>
-            <a:off x="1005840" y="2395728"/>
-            <a:ext cx="4617720" cy="1005840"/>
+            <a:off x="3566160" y="1920240"/>
+            <a:ext cx="7589520" cy="868680"/>
           </a:xfrm>
           <a:prstGeom prst="rect">
             <a:avLst/>
@@ -8253,12 +10201,12 @@
           <a:p>
             <a:pPr indent="0" marL="0">
               <a:lnSpc>
-                <a:spcPts val="2000"/>
+                <a:spcPts val="2100"/>
               </a:lnSpc>
               <a:buNone/>
             </a:pPr>
             <a:r>
-              <a:rPr lang="en-US" sz="1300" dirty="0">
+              <a:rPr lang="en-US" sz="1350" dirty="0">
                 <a:solidFill>
                   <a:srgbClr val="403B33"/>
                 </a:solidFill>
@@ -8266,9 +10214,9 @@
                 <a:ea typeface="Calibri" pitchFamily="34" charset="-122"/>
                 <a:cs typeface="Calibri" pitchFamily="34" charset="-120"/>
               </a:rPr>
-              <a:t>The server should sit in Mumbai or Bangalore. It is Indian patients’ health data, governed by the DPDP Act 2023, and keeping it in the country avoids the whole question.</a:t>
-            </a:r>
-            <a:endParaRPr lang="en-US" sz="1300" dirty="0"/>
+              <a:t>Written with React. It is only pictures and words — it holds no records and cannot be trusted with any, because it runs on the patient’s own phone where anybody could change it.</a:t>
+            </a:r>
+            <a:endParaRPr lang="en-US" sz="1350" dirty="0"/>
           </a:p>
         </p:txBody>
       </p:sp>
@@ -8280,16 +10228,16 @@
         </p:nvSpPr>
         <p:spPr>
           <a:xfrm>
-            <a:off x="6217920" y="1737360"/>
-            <a:ext cx="5257800" cy="1783080"/>
+            <a:off x="685800" y="3154680"/>
+            <a:ext cx="10789920" cy="1188720"/>
           </a:xfrm>
           <a:prstGeom prst="roundRect">
             <a:avLst>
-              <a:gd name="adj" fmla="val 4103"/>
+              <a:gd name="adj" fmla="val 4615"/>
             </a:avLst>
           </a:prstGeom>
           <a:solidFill>
-            <a:srgbClr val="F4F2EC"/>
+            <a:srgbClr val="FFFFFF"/>
           </a:solidFill>
           <a:ln w="12700">
             <a:solidFill>
@@ -8307,34 +10255,34 @@
         </p:nvSpPr>
         <p:spPr>
           <a:xfrm>
-            <a:off x="6537960" y="1965960"/>
-            <a:ext cx="4617720" cy="365760"/>
-          </a:xfrm>
-          <a:prstGeom prst="rect">
-            <a:avLst/>
-          </a:prstGeom>
-          <a:noFill/>
-          <a:ln/>
-        </p:spPr>
-        <p:txBody>
-          <a:bodyPr wrap="square" lIns="0" tIns="0" rIns="0" bIns="0" rtlCol="0" anchor="ctr"/>
-          <a:lstStyle/>
-          <a:p>
-            <a:pPr indent="0" marL="0">
-              <a:buNone/>
-            </a:pPr>
-            <a:r>
-              <a:rPr lang="en-US" sz="1800" b="1" dirty="0">
-                <a:solidFill>
-                  <a:srgbClr val="16130F"/>
+            <a:off x="1005840" y="3374136"/>
+            <a:ext cx="2377440" cy="457200"/>
+          </a:xfrm>
+          <a:prstGeom prst="rect">
+            <a:avLst/>
+          </a:prstGeom>
+          <a:noFill/>
+          <a:ln/>
+        </p:spPr>
+        <p:txBody>
+          <a:bodyPr wrap="square" lIns="0" tIns="0" rIns="0" bIns="0" rtlCol="0" anchor="ctr"/>
+          <a:lstStyle/>
+          <a:p>
+            <a:pPr indent="0" marL="0">
+              <a:buNone/>
+            </a:pPr>
+            <a:r>
+              <a:rPr lang="en-US" sz="2000" b="1" dirty="0">
+                <a:solidFill>
+                  <a:srgbClr val="0E6A5C"/>
                 </a:solidFill>
                 <a:latin typeface="Cambria" pitchFamily="34" charset="0"/>
                 <a:ea typeface="Cambria" pitchFamily="34" charset="-122"/>
                 <a:cs typeface="Cambria" pitchFamily="34" charset="-120"/>
               </a:rPr>
-              <a:t>In the hospital’s own account</a:t>
-            </a:r>
-            <a:endParaRPr lang="en-US" sz="1800" dirty="0"/>
+              <a:t>The server</a:t>
+            </a:r>
+            <a:endParaRPr lang="en-US" sz="2000" dirty="0"/>
           </a:p>
         </p:txBody>
       </p:sp>
@@ -8346,8 +10294,8 @@
         </p:nvSpPr>
         <p:spPr>
           <a:xfrm>
-            <a:off x="6537960" y="2395728"/>
-            <a:ext cx="4617720" cy="1005840"/>
+            <a:off x="3566160" y="3337560"/>
+            <a:ext cx="7589520" cy="868680"/>
           </a:xfrm>
           <a:prstGeom prst="rect">
             <a:avLst/>
@@ -8361,12 +10309,12 @@
           <a:p>
             <a:pPr indent="0" marL="0">
               <a:lnSpc>
-                <a:spcPts val="2000"/>
+                <a:spcPts val="2100"/>
               </a:lnSpc>
               <a:buNone/>
             </a:pPr>
             <a:r>
-              <a:rPr lang="en-US" sz="1300" dirty="0">
+              <a:rPr lang="en-US" sz="1350" dirty="0">
                 <a:solidFill>
                   <a:srgbClr val="403B33"/>
                 </a:solidFill>
@@ -8374,9 +10322,9 @@
                 <a:ea typeface="Calibri" pitchFamily="34" charset="-122"/>
                 <a:cs typeface="Calibri" pitchFamily="34" charset="-120"/>
               </a:rPr>
-              <a:t>The domain, the server and the backups registered to Deepan Hospital — not to me. A supplier holding a hospital’s patient data is a problem for both sides.</a:t>
-            </a:r>
-            <a:endParaRPr lang="en-US" sz="1300" dirty="0"/>
+              <a:t>Written with Node and Express. It is the only thing allowed to say yes. Every rule lives here — so even if somebody tampered with the website on their own phone, they would get no further than the counter.</a:t>
+            </a:r>
+            <a:endParaRPr lang="en-US" sz="1350" dirty="0"/>
           </a:p>
         </p:txBody>
       </p:sp>
@@ -8388,16 +10336,16 @@
         </p:nvSpPr>
         <p:spPr>
           <a:xfrm>
-            <a:off x="685800" y="3794760"/>
-            <a:ext cx="5257800" cy="1783080"/>
+            <a:off x="685800" y="4572000"/>
+            <a:ext cx="10789920" cy="1188720"/>
           </a:xfrm>
           <a:prstGeom prst="roundRect">
             <a:avLst>
-              <a:gd name="adj" fmla="val 4103"/>
+              <a:gd name="adj" fmla="val 4615"/>
             </a:avLst>
           </a:prstGeom>
           <a:solidFill>
-            <a:srgbClr val="F4F2EC"/>
+            <a:srgbClr val="FFFFFF"/>
           </a:solidFill>
           <a:ln w="12700">
             <a:solidFill>
@@ -8415,34 +10363,34 @@
         </p:nvSpPr>
         <p:spPr>
           <a:xfrm>
-            <a:off x="1005840" y="4023360"/>
-            <a:ext cx="4617720" cy="365760"/>
-          </a:xfrm>
-          <a:prstGeom prst="rect">
-            <a:avLst/>
-          </a:prstGeom>
-          <a:noFill/>
-          <a:ln/>
-        </p:spPr>
-        <p:txBody>
-          <a:bodyPr wrap="square" lIns="0" tIns="0" rIns="0" bIns="0" rtlCol="0" anchor="ctr"/>
-          <a:lstStyle/>
-          <a:p>
-            <a:pPr indent="0" marL="0">
-              <a:buNone/>
-            </a:pPr>
-            <a:r>
-              <a:rPr lang="en-US" sz="1800" b="1" dirty="0">
-                <a:solidFill>
-                  <a:srgbClr val="16130F"/>
+            <a:off x="1005840" y="4791456"/>
+            <a:ext cx="2377440" cy="457200"/>
+          </a:xfrm>
+          <a:prstGeom prst="rect">
+            <a:avLst/>
+          </a:prstGeom>
+          <a:noFill/>
+          <a:ln/>
+        </p:spPr>
+        <p:txBody>
+          <a:bodyPr wrap="square" lIns="0" tIns="0" rIns="0" bIns="0" rtlCol="0" anchor="ctr"/>
+          <a:lstStyle/>
+          <a:p>
+            <a:pPr indent="0" marL="0">
+              <a:buNone/>
+            </a:pPr>
+            <a:r>
+              <a:rPr lang="en-US" sz="2000" b="1" dirty="0">
+                <a:solidFill>
+                  <a:srgbClr val="0E6A5C"/>
                 </a:solidFill>
                 <a:latin typeface="Cambria" pitchFamily="34" charset="0"/>
                 <a:ea typeface="Cambria" pitchFamily="34" charset="-122"/>
                 <a:cs typeface="Cambria" pitchFamily="34" charset="-120"/>
               </a:rPr>
-              <a:t>Copied off the machine</a:t>
-            </a:r>
-            <a:endParaRPr lang="en-US" sz="1800" dirty="0"/>
+              <a:t>The database</a:t>
+            </a:r>
+            <a:endParaRPr lang="en-US" sz="2000" dirty="0"/>
           </a:p>
         </p:txBody>
       </p:sp>
@@ -8454,8 +10402,8 @@
         </p:nvSpPr>
         <p:spPr>
           <a:xfrm>
-            <a:off x="1005840" y="4453128"/>
-            <a:ext cx="4617720" cy="1005840"/>
+            <a:off x="3566160" y="4754880"/>
+            <a:ext cx="7589520" cy="868680"/>
           </a:xfrm>
           <a:prstGeom prst="rect">
             <a:avLst/>
@@ -8469,12 +10417,12 @@
           <a:p>
             <a:pPr indent="0" marL="0">
               <a:lnSpc>
-                <a:spcPts val="2000"/>
+                <a:spcPts val="2100"/>
               </a:lnSpc>
               <a:buNone/>
             </a:pPr>
             <a:r>
-              <a:rPr lang="en-US" sz="1300" dirty="0">
+              <a:rPr lang="en-US" sz="1350" dirty="0">
                 <a:solidFill>
                   <a:srgbClr val="403B33"/>
                 </a:solidFill>
@@ -8482,117 +10430,48 @@
                 <a:ea typeface="Calibri" pitchFamily="34" charset="-122"/>
                 <a:cs typeface="Calibri" pitchFamily="34" charset="-120"/>
               </a:rPr>
-              <a:t>A backup is written every six hours. Those copies must also be pulled somewhere else — a backup on the same disk is no protection against that disk failing.</a:t>
-            </a:r>
-            <a:endParaRPr lang="en-US" sz="1300" dirty="0"/>
-          </a:p>
-        </p:txBody>
-      </p:sp>
-      <p:sp>
-        <p:nvSpPr>
-          <p:cNvPr id="13" name="Shape 11"/>
-          <p:cNvSpPr/>
-          <p:nvPr/>
-        </p:nvSpPr>
-        <p:spPr>
-          <a:xfrm>
-            <a:off x="6217920" y="3794760"/>
-            <a:ext cx="5257800" cy="1783080"/>
-          </a:xfrm>
-          <a:prstGeom prst="roundRect">
-            <a:avLst>
-              <a:gd name="adj" fmla="val 4103"/>
-            </a:avLst>
-          </a:prstGeom>
-          <a:solidFill>
-            <a:srgbClr val="F4F2EC"/>
-          </a:solidFill>
-          <a:ln w="12700">
-            <a:solidFill>
-              <a:srgbClr val="E7E3D9"/>
-            </a:solidFill>
-            <a:prstDash val="solid"/>
-          </a:ln>
-        </p:spPr>
-      </p:sp>
-      <p:sp>
-        <p:nvSpPr>
-          <p:cNvPr id="14" name="Text 12"/>
-          <p:cNvSpPr/>
-          <p:nvPr/>
-        </p:nvSpPr>
-        <p:spPr>
-          <a:xfrm>
-            <a:off x="6537960" y="4023360"/>
-            <a:ext cx="4617720" cy="365760"/>
-          </a:xfrm>
-          <a:prstGeom prst="rect">
-            <a:avLst/>
-          </a:prstGeom>
-          <a:noFill/>
-          <a:ln/>
-        </p:spPr>
-        <p:txBody>
-          <a:bodyPr wrap="square" lIns="0" tIns="0" rIns="0" bIns="0" rtlCol="0" anchor="ctr"/>
-          <a:lstStyle/>
-          <a:p>
-            <a:pPr indent="0" marL="0">
-              <a:buNone/>
-            </a:pPr>
-            <a:r>
-              <a:rPr lang="en-US" sz="1800" b="1" dirty="0">
-                <a:solidFill>
-                  <a:srgbClr val="16130F"/>
-                </a:solidFill>
-                <a:latin typeface="Cambria" pitchFamily="34" charset="0"/>
-                <a:ea typeface="Cambria" pitchFamily="34" charset="-122"/>
-                <a:cs typeface="Cambria" pitchFamily="34" charset="-120"/>
-              </a:rPr>
-              <a:t>Nothing at risk today</a:t>
-            </a:r>
-            <a:endParaRPr lang="en-US" sz="1800" dirty="0"/>
-          </a:p>
-        </p:txBody>
-      </p:sp>
-      <p:sp>
-        <p:nvSpPr>
-          <p:cNvPr id="15" name="Text 13"/>
-          <p:cNvSpPr/>
-          <p:nvPr/>
-        </p:nvSpPr>
-        <p:spPr>
-          <a:xfrm>
-            <a:off x="6537960" y="4453128"/>
-            <a:ext cx="4617720" cy="1005840"/>
-          </a:xfrm>
-          <a:prstGeom prst="rect">
-            <a:avLst/>
-          </a:prstGeom>
-          <a:noFill/>
-          <a:ln/>
-        </p:spPr>
-        <p:txBody>
-          <a:bodyPr wrap="square" lIns="0" tIns="0" rIns="0" bIns="0" rtlCol="0" anchor="ctr"/>
-          <a:lstStyle/>
-          <a:p>
-            <a:pPr indent="0" marL="0">
-              <a:lnSpc>
-                <a:spcPts val="2000"/>
-              </a:lnSpc>
-              <a:buNone/>
-            </a:pPr>
-            <a:r>
-              <a:rPr lang="en-US" sz="1300" dirty="0">
-                <a:solidFill>
-                  <a:srgbClr val="403B33"/>
-                </a:solidFill>
-                <a:latin typeface="Calibri" pitchFamily="34" charset="0"/>
-                <a:ea typeface="Calibri" pitchFamily="34" charset="-122"/>
-                <a:cs typeface="Calibri" pitchFamily="34" charset="-120"/>
-              </a:rPr>
-              <a:t>The database holds the doctor roster and no real patients. Everything so far has been built and tested without a single patient record in it.</a:t>
-            </a:r>
-            <a:endParaRPr lang="en-US" sz="1300" dirty="0"/>
+              <a:t>SQLite — a single file on the server’s disk. Small, fast, and nothing extra to pay for or run. It is copied automatically every six hours.</a:t>
+            </a:r>
+            <a:endParaRPr lang="en-US" sz="1350" dirty="0"/>
+          </a:p>
+        </p:txBody>
+      </p:sp>
+      <p:sp>
+        <p:nvSpPr>
+          <p:cNvPr id="13" name="Text 11"/>
+          <p:cNvSpPr/>
+          <p:nvPr/>
+        </p:nvSpPr>
+        <p:spPr>
+          <a:xfrm>
+            <a:off x="685800" y="5852160"/>
+            <a:ext cx="10789920" cy="457200"/>
+          </a:xfrm>
+          <a:prstGeom prst="rect">
+            <a:avLst/>
+          </a:prstGeom>
+          <a:noFill/>
+          <a:ln/>
+        </p:spPr>
+        <p:txBody>
+          <a:bodyPr wrap="square" lIns="0" tIns="0" rIns="0" bIns="0" rtlCol="0" anchor="ctr"/>
+          <a:lstStyle/>
+          <a:p>
+            <a:pPr indent="0" marL="0">
+              <a:buNone/>
+            </a:pPr>
+            <a:r>
+              <a:rPr lang="en-US" sz="1400" i="1" dirty="0">
+                <a:solidFill>
+                  <a:srgbClr val="706B5E"/>
+                </a:solidFill>
+                <a:latin typeface="Calibri" pitchFamily="34" charset="0"/>
+                <a:ea typeface="Calibri" pitchFamily="34" charset="-122"/>
+                <a:cs typeface="Calibri" pitchFamily="34" charset="-120"/>
+              </a:rPr>
+              <a:t>All three are free and open source. There is no licence to renew and no company that can raise a price later — adding the 26th doctor costs nothing.</a:t>
+            </a:r>
+            <a:endParaRPr lang="en-US" sz="1400" dirty="0"/>
           </a:p>
         </p:txBody>
       </p:sp>
@@ -8661,7 +10540,7 @@
                 <a:ea typeface="Calibri" pitchFamily="34" charset="-122"/>
                 <a:cs typeface="Calibri" pitchFamily="34" charset="-120"/>
               </a:rPr>
-              <a:t>THE IMPORTANT ONE</a:t>
+              <a:t>A WORD THAT MEANS TWO THINGS</a:t>
             </a:r>
             <a:endParaRPr lang="en-US" sz="1100" dirty="0"/>
           </a:p>
@@ -8700,7 +10579,7 @@
                 <a:ea typeface="Cambria" pitchFamily="34" charset="-122"/>
                 <a:cs typeface="Cambria" pitchFamily="34" charset="-120"/>
               </a:rPr>
-              <a:t>It does not replace Klinique</a:t>
+              <a:t>Have we built a server? Yes — and not yet</a:t>
             </a:r>
             <a:endParaRPr lang="en-US" sz="3400" dirty="0"/>
           </a:p>
@@ -8715,11 +10594,11 @@
         <p:spPr>
           <a:xfrm>
             <a:off x="685800" y="1737360"/>
-            <a:ext cx="5257800" cy="2834640"/>
+            <a:ext cx="5257800" cy="3063240"/>
           </a:xfrm>
           <a:prstGeom prst="roundRect">
             <a:avLst>
-              <a:gd name="adj" fmla="val 2581"/>
+              <a:gd name="adj" fmla="val 2388"/>
             </a:avLst>
           </a:prstGeom>
           <a:solidFill>
@@ -8742,23 +10621,23 @@
         <p:spPr>
           <a:xfrm>
             <a:off x="1005840" y="1965960"/>
-            <a:ext cx="4617720" cy="457200"/>
-          </a:xfrm>
-          <a:prstGeom prst="rect">
-            <a:avLst/>
-          </a:prstGeom>
-          <a:noFill/>
-          <a:ln/>
-        </p:spPr>
-        <p:txBody>
-          <a:bodyPr wrap="square" lIns="0" tIns="0" rIns="0" bIns="0" rtlCol="0" anchor="ctr"/>
-          <a:lstStyle/>
-          <a:p>
-            <a:pPr indent="0" marL="0">
-              <a:buNone/>
-            </a:pPr>
-            <a:r>
-              <a:rPr lang="en-US" sz="2400" b="1" dirty="0">
+            <a:ext cx="4617720" cy="411480"/>
+          </a:xfrm>
+          <a:prstGeom prst="rect">
+            <a:avLst/>
+          </a:prstGeom>
+          <a:noFill/>
+          <a:ln/>
+        </p:spPr>
+        <p:txBody>
+          <a:bodyPr wrap="square" lIns="0" tIns="0" rIns="0" bIns="0" rtlCol="0" anchor="ctr"/>
+          <a:lstStyle/>
+          <a:p>
+            <a:pPr indent="0" marL="0">
+              <a:buNone/>
+            </a:pPr>
+            <a:r>
+              <a:rPr lang="en-US" sz="2200" b="1" dirty="0">
                 <a:solidFill>
                   <a:srgbClr val="0E6A5C"/>
                 </a:solidFill>
@@ -8766,9 +10645,9 @@
                 <a:ea typeface="Cambria" pitchFamily="34" charset="-122"/>
                 <a:cs typeface="Cambria" pitchFamily="34" charset="-120"/>
               </a:rPr>
-              <a:t>This app</a:t>
-            </a:r>
-            <a:endParaRPr lang="en-US" sz="2400" dirty="0"/>
+              <a:t>Built — the program</a:t>
+            </a:r>
+            <a:endParaRPr lang="en-US" sz="2200" dirty="0"/>
           </a:p>
         </p:txBody>
       </p:sp>
@@ -8780,28 +10659,27 @@
         </p:nvSpPr>
         <p:spPr>
           <a:xfrm>
-            <a:off x="1005840" y="2560320"/>
-            <a:ext cx="4617720" cy="1828800"/>
-          </a:xfrm>
-          <a:prstGeom prst="rect">
-            <a:avLst/>
-          </a:prstGeom>
-          <a:noFill/>
-          <a:ln/>
-        </p:spPr>
-        <p:txBody>
-          <a:bodyPr wrap="square" lIns="0" tIns="0" rIns="0" bIns="0" rtlCol="0" anchor="ctr"/>
-          <a:lstStyle/>
-          <a:p>
-            <a:pPr marL="342900" indent="-342900">
-              <a:spcAft>
-                <a:spcPts val="800"/>
-              </a:spcAft>
-              <a:buSzPct val="100000"/>
-              <a:buChar char="•"/>
-            </a:pPr>
-            <a:r>
-              <a:rPr lang="en-US" sz="1400" dirty="0">
+            <a:off x="1005840" y="2514600"/>
+            <a:ext cx="4617720" cy="1554480"/>
+          </a:xfrm>
+          <a:prstGeom prst="rect">
+            <a:avLst/>
+          </a:prstGeom>
+          <a:noFill/>
+          <a:ln/>
+        </p:spPr>
+        <p:txBody>
+          <a:bodyPr wrap="square" lIns="0" tIns="0" rIns="0" bIns="0" rtlCol="0" anchor="ctr"/>
+          <a:lstStyle/>
+          <a:p>
+            <a:pPr indent="0" marL="0">
+              <a:lnSpc>
+                <a:spcPts val="2100"/>
+              </a:lnSpc>
+              <a:buNone/>
+            </a:pPr>
+            <a:r>
+              <a:rPr lang="en-US" sz="1300" dirty="0">
                 <a:solidFill>
                   <a:srgbClr val="403B33"/>
                 </a:solidFill>
@@ -8809,89 +10687,212 @@
                 <a:ea typeface="Calibri" pitchFamily="34" charset="-122"/>
                 <a:cs typeface="Calibri" pitchFamily="34" charset="-120"/>
               </a:rPr>
-              <a:t>The public booking page</a:t>
-            </a:r>
-            <a:endParaRPr lang="en-US" sz="1400" dirty="0"/>
-          </a:p>
-          <a:p>
-            <a:pPr marL="342900" indent="-342900">
-              <a:spcAft>
-                <a:spcPts val="800"/>
-              </a:spcAft>
-              <a:buSzPct val="100000"/>
-              <a:buChar char="•"/>
-            </a:pPr>
-            <a:r>
-              <a:rPr lang="en-US" sz="1400" dirty="0">
-                <a:solidFill>
-                  <a:srgbClr val="403B33"/>
-                </a:solidFill>
-                <a:latin typeface="Calibri" pitchFamily="34" charset="0"/>
-                <a:ea typeface="Calibri" pitchFamily="34" charset="-122"/>
-                <a:cs typeface="Calibri" pitchFamily="34" charset="-120"/>
-              </a:rPr>
-              <a:t>Departments, doctors, fees, free times</a:t>
-            </a:r>
-            <a:endParaRPr lang="en-US" sz="1400" dirty="0"/>
-          </a:p>
-          <a:p>
-            <a:pPr marL="342900" indent="-342900">
-              <a:spcAft>
-                <a:spcPts val="800"/>
-              </a:spcAft>
-              <a:buSzPct val="100000"/>
-              <a:buChar char="•"/>
-            </a:pPr>
-            <a:r>
-              <a:rPr lang="en-US" sz="1400" dirty="0">
-                <a:solidFill>
-                  <a:srgbClr val="403B33"/>
-                </a:solidFill>
-                <a:latin typeface="Calibri" pitchFamily="34" charset="0"/>
-                <a:ea typeface="Calibri" pitchFamily="34" charset="-122"/>
-                <a:cs typeface="Calibri" pitchFamily="34" charset="-120"/>
-              </a:rPr>
-              <a:t>The reception screen</a:t>
-            </a:r>
-            <a:endParaRPr lang="en-US" sz="1400" dirty="0"/>
-          </a:p>
-          <a:p>
-            <a:pPr marL="342900" indent="-342900">
-              <a:spcAft>
-                <a:spcPts val="800"/>
-              </a:spcAft>
-              <a:buSzPct val="100000"/>
-              <a:buChar char="•"/>
-            </a:pPr>
-            <a:r>
-              <a:rPr lang="en-US" sz="1400" dirty="0">
-                <a:solidFill>
-                  <a:srgbClr val="403B33"/>
-                </a:solidFill>
-                <a:latin typeface="Calibri" pitchFamily="34" charset="0"/>
-                <a:ea typeface="Calibri" pitchFamily="34" charset="-122"/>
-                <a:cs typeface="Calibri" pitchFamily="34" charset="-120"/>
-              </a:rPr>
-              <a:t>Sends the patient their appointment</a:t>
-            </a:r>
-            <a:endParaRPr lang="en-US" sz="1400" dirty="0"/>
-          </a:p>
-        </p:txBody>
-      </p:sp>
-      <p:sp>
-        <p:nvSpPr>
-          <p:cNvPr id="7" name="Shape 5"/>
+              <a:t>Twenty-nine files, about 6,500 lines, and 109 tests that pass. It handles accounts, the doctor catalogue, appointments, payments, the reception desk and its own backups.</a:t>
+            </a:r>
+            <a:endParaRPr lang="en-US" sz="1300" dirty="0"/>
+          </a:p>
+        </p:txBody>
+      </p:sp>
+      <p:sp>
+        <p:nvSpPr>
+          <p:cNvPr id="7" name="Text 5"/>
+          <p:cNvSpPr/>
+          <p:nvPr/>
+        </p:nvSpPr>
+        <p:spPr>
+          <a:xfrm>
+            <a:off x="1005840" y="4160520"/>
+            <a:ext cx="4617720" cy="457200"/>
+          </a:xfrm>
+          <a:prstGeom prst="rect">
+            <a:avLst/>
+          </a:prstGeom>
+          <a:noFill/>
+          <a:ln/>
+        </p:spPr>
+        <p:txBody>
+          <a:bodyPr wrap="square" lIns="0" tIns="0" rIns="0" bIns="0" rtlCol="0" anchor="ctr"/>
+          <a:lstStyle/>
+          <a:p>
+            <a:pPr indent="0" marL="0">
+              <a:buNone/>
+            </a:pPr>
+            <a:r>
+              <a:rPr lang="en-US" sz="1300" b="1" dirty="0">
+                <a:solidFill>
+                  <a:srgbClr val="0E6A5C"/>
+                </a:solidFill>
+                <a:latin typeface="Calibri" pitchFamily="34" charset="0"/>
+                <a:ea typeface="Calibri" pitchFamily="34" charset="-122"/>
+                <a:cs typeface="Calibri" pitchFamily="34" charset="-120"/>
+              </a:rPr>
+              <a:t>This is finished. It runs today.</a:t>
+            </a:r>
+            <a:endParaRPr lang="en-US" sz="1300" dirty="0"/>
+          </a:p>
+        </p:txBody>
+      </p:sp>
+      <p:sp>
+        <p:nvSpPr>
+          <p:cNvPr id="8" name="Shape 6"/>
           <p:cNvSpPr/>
           <p:nvPr/>
         </p:nvSpPr>
         <p:spPr>
           <a:xfrm>
             <a:off x="6217920" y="1737360"/>
-            <a:ext cx="5257800" cy="2834640"/>
+            <a:ext cx="5257800" cy="3063240"/>
           </a:xfrm>
           <a:prstGeom prst="roundRect">
             <a:avLst>
-              <a:gd name="adj" fmla="val 2581"/>
+              <a:gd name="adj" fmla="val 2388"/>
+            </a:avLst>
+          </a:prstGeom>
+          <a:solidFill>
+            <a:srgbClr val="FDF6E7"/>
+          </a:solidFill>
+          <a:ln w="12700">
+            <a:solidFill>
+              <a:srgbClr val="E8D3A3"/>
+            </a:solidFill>
+            <a:prstDash val="solid"/>
+          </a:ln>
+        </p:spPr>
+      </p:sp>
+      <p:sp>
+        <p:nvSpPr>
+          <p:cNvPr id="9" name="Text 7"/>
+          <p:cNvSpPr/>
+          <p:nvPr/>
+        </p:nvSpPr>
+        <p:spPr>
+          <a:xfrm>
+            <a:off x="6537960" y="1965960"/>
+            <a:ext cx="4617720" cy="411480"/>
+          </a:xfrm>
+          <a:prstGeom prst="rect">
+            <a:avLst/>
+          </a:prstGeom>
+          <a:noFill/>
+          <a:ln/>
+        </p:spPr>
+        <p:txBody>
+          <a:bodyPr wrap="square" lIns="0" tIns="0" rIns="0" bIns="0" rtlCol="0" anchor="ctr"/>
+          <a:lstStyle/>
+          <a:p>
+            <a:pPr indent="0" marL="0">
+              <a:buNone/>
+            </a:pPr>
+            <a:r>
+              <a:rPr lang="en-US" sz="2200" b="1" dirty="0">
+                <a:solidFill>
+                  <a:srgbClr val="8A5A12"/>
+                </a:solidFill>
+                <a:latin typeface="Cambria" pitchFamily="34" charset="0"/>
+                <a:ea typeface="Cambria" pitchFamily="34" charset="-122"/>
+                <a:cs typeface="Cambria" pitchFamily="34" charset="-120"/>
+              </a:rPr>
+              <a:t>Not yet — the machine</a:t>
+            </a:r>
+            <a:endParaRPr lang="en-US" sz="2200" dirty="0"/>
+          </a:p>
+        </p:txBody>
+      </p:sp>
+      <p:sp>
+        <p:nvSpPr>
+          <p:cNvPr id="10" name="Text 8"/>
+          <p:cNvSpPr/>
+          <p:nvPr/>
+        </p:nvSpPr>
+        <p:spPr>
+          <a:xfrm>
+            <a:off x="6537960" y="2514600"/>
+            <a:ext cx="4617720" cy="1554480"/>
+          </a:xfrm>
+          <a:prstGeom prst="rect">
+            <a:avLst/>
+          </a:prstGeom>
+          <a:noFill/>
+          <a:ln/>
+        </p:spPr>
+        <p:txBody>
+          <a:bodyPr wrap="square" lIns="0" tIns="0" rIns="0" bIns="0" rtlCol="0" anchor="ctr"/>
+          <a:lstStyle/>
+          <a:p>
+            <a:pPr indent="0" marL="0">
+              <a:lnSpc>
+                <a:spcPts val="2100"/>
+              </a:lnSpc>
+              <a:buNone/>
+            </a:pPr>
+            <a:r>
+              <a:rPr lang="en-US" sz="1300" dirty="0">
+                <a:solidFill>
+                  <a:srgbClr val="403B33"/>
+                </a:solidFill>
+                <a:latin typeface="Calibri" pitchFamily="34" charset="0"/>
+                <a:ea typeface="Calibri" pitchFamily="34" charset="-122"/>
+                <a:cs typeface="Calibri" pitchFamily="34" charset="-120"/>
+              </a:rPr>
+              <a:t>A rented computer in Mumbai or Bengaluru for the program to live on, so it is running at three in the morning when somebody books. Roughly ₹6,000 – ₹18,000 a year, plus about ₹1,000 for the domain name.</a:t>
+            </a:r>
+            <a:endParaRPr lang="en-US" sz="1300" dirty="0"/>
+          </a:p>
+        </p:txBody>
+      </p:sp>
+      <p:sp>
+        <p:nvSpPr>
+          <p:cNvPr id="11" name="Text 9"/>
+          <p:cNvSpPr/>
+          <p:nvPr/>
+        </p:nvSpPr>
+        <p:spPr>
+          <a:xfrm>
+            <a:off x="6537960" y="4160520"/>
+            <a:ext cx="4617720" cy="457200"/>
+          </a:xfrm>
+          <a:prstGeom prst="rect">
+            <a:avLst/>
+          </a:prstGeom>
+          <a:noFill/>
+          <a:ln/>
+        </p:spPr>
+        <p:txBody>
+          <a:bodyPr wrap="square" lIns="0" tIns="0" rIns="0" bIns="0" rtlCol="0" anchor="ctr"/>
+          <a:lstStyle/>
+          <a:p>
+            <a:pPr indent="0" marL="0">
+              <a:buNone/>
+            </a:pPr>
+            <a:r>
+              <a:rPr lang="en-US" sz="1300" b="1" dirty="0">
+                <a:solidFill>
+                  <a:srgbClr val="8A5A12"/>
+                </a:solidFill>
+                <a:latin typeface="Calibri" pitchFamily="34" charset="0"/>
+                <a:ea typeface="Calibri" pitchFamily="34" charset="-122"/>
+                <a:cs typeface="Calibri" pitchFamily="34" charset="-120"/>
+              </a:rPr>
+              <a:t>Until this is done, it only runs when somebody starts it.</a:t>
+            </a:r>
+            <a:endParaRPr lang="en-US" sz="1300" dirty="0"/>
+          </a:p>
+        </p:txBody>
+      </p:sp>
+      <p:sp>
+        <p:nvSpPr>
+          <p:cNvPr id="12" name="Shape 10"/>
+          <p:cNvSpPr/>
+          <p:nvPr/>
+        </p:nvSpPr>
+        <p:spPr>
+          <a:xfrm>
+            <a:off x="685800" y="5074920"/>
+            <a:ext cx="10789920" cy="1051560"/>
+          </a:xfrm>
+          <a:prstGeom prst="roundRect">
+            <a:avLst>
+              <a:gd name="adj" fmla="val 6957"/>
             </a:avLst>
           </a:prstGeom>
           <a:solidFill>
@@ -8907,186 +10908,14 @@
       </p:sp>
       <p:sp>
         <p:nvSpPr>
-          <p:cNvPr id="8" name="Text 6"/>
-          <p:cNvSpPr/>
-          <p:nvPr/>
-        </p:nvSpPr>
-        <p:spPr>
-          <a:xfrm>
-            <a:off x="6537960" y="1965960"/>
-            <a:ext cx="4617720" cy="457200"/>
-          </a:xfrm>
-          <a:prstGeom prst="rect">
-            <a:avLst/>
-          </a:prstGeom>
-          <a:noFill/>
-          <a:ln/>
-        </p:spPr>
-        <p:txBody>
-          <a:bodyPr wrap="square" lIns="0" tIns="0" rIns="0" bIns="0" rtlCol="0" anchor="ctr"/>
-          <a:lstStyle/>
-          <a:p>
-            <a:pPr indent="0" marL="0">
-              <a:buNone/>
-            </a:pPr>
-            <a:r>
-              <a:rPr lang="en-US" sz="2400" b="1" dirty="0">
-                <a:solidFill>
-                  <a:srgbClr val="16130F"/>
-                </a:solidFill>
-                <a:latin typeface="Cambria" pitchFamily="34" charset="0"/>
-                <a:ea typeface="Cambria" pitchFamily="34" charset="-122"/>
-                <a:cs typeface="Cambria" pitchFamily="34" charset="-120"/>
-              </a:rPr>
-              <a:t>Klinique</a:t>
-            </a:r>
-            <a:endParaRPr lang="en-US" sz="2400" dirty="0"/>
-          </a:p>
-        </p:txBody>
-      </p:sp>
-      <p:sp>
-        <p:nvSpPr>
-          <p:cNvPr id="9" name="Text 7"/>
-          <p:cNvSpPr/>
-          <p:nvPr/>
-        </p:nvSpPr>
-        <p:spPr>
-          <a:xfrm>
-            <a:off x="6537960" y="2560320"/>
-            <a:ext cx="4617720" cy="1828800"/>
-          </a:xfrm>
-          <a:prstGeom prst="rect">
-            <a:avLst/>
-          </a:prstGeom>
-          <a:noFill/>
-          <a:ln/>
-        </p:spPr>
-        <p:txBody>
-          <a:bodyPr wrap="square" lIns="0" tIns="0" rIns="0" bIns="0" rtlCol="0" anchor="ctr"/>
-          <a:lstStyle/>
-          <a:p>
-            <a:pPr marL="342900" indent="-342900">
-              <a:spcAft>
-                <a:spcPts val="800"/>
-              </a:spcAft>
-              <a:buSzPct val="100000"/>
-              <a:buChar char="•"/>
-            </a:pPr>
-            <a:r>
-              <a:rPr lang="en-US" sz="1400" dirty="0">
-                <a:solidFill>
-                  <a:srgbClr val="403B33"/>
-                </a:solidFill>
-                <a:latin typeface="Calibri" pitchFamily="34" charset="0"/>
-                <a:ea typeface="Calibri" pitchFamily="34" charset="-122"/>
-                <a:cs typeface="Calibri" pitchFamily="34" charset="-120"/>
-              </a:rPr>
-              <a:t>The clinical record</a:t>
-            </a:r>
-            <a:endParaRPr lang="en-US" sz="1400" dirty="0"/>
-          </a:p>
-          <a:p>
-            <a:pPr marL="342900" indent="-342900">
-              <a:spcAft>
-                <a:spcPts val="800"/>
-              </a:spcAft>
-              <a:buSzPct val="100000"/>
-              <a:buChar char="•"/>
-            </a:pPr>
-            <a:r>
-              <a:rPr lang="en-US" sz="1400" dirty="0">
-                <a:solidFill>
-                  <a:srgbClr val="403B33"/>
-                </a:solidFill>
-                <a:latin typeface="Calibri" pitchFamily="34" charset="0"/>
-                <a:ea typeface="Calibri" pitchFamily="34" charset="-122"/>
-                <a:cs typeface="Calibri" pitchFamily="34" charset="-120"/>
-              </a:rPr>
-              <a:t>Prescriptions and consultation notes</a:t>
-            </a:r>
-            <a:endParaRPr lang="en-US" sz="1400" dirty="0"/>
-          </a:p>
-          <a:p>
-            <a:pPr marL="342900" indent="-342900">
-              <a:spcAft>
-                <a:spcPts val="800"/>
-              </a:spcAft>
-              <a:buSzPct val="100000"/>
-              <a:buChar char="•"/>
-            </a:pPr>
-            <a:r>
-              <a:rPr lang="en-US" sz="1400" dirty="0">
-                <a:solidFill>
-                  <a:srgbClr val="403B33"/>
-                </a:solidFill>
-                <a:latin typeface="Calibri" pitchFamily="34" charset="0"/>
-                <a:ea typeface="Calibri" pitchFamily="34" charset="-122"/>
-                <a:cs typeface="Calibri" pitchFamily="34" charset="-120"/>
-              </a:rPr>
-              <a:t>Patient history</a:t>
-            </a:r>
-            <a:endParaRPr lang="en-US" sz="1400" dirty="0"/>
-          </a:p>
-          <a:p>
-            <a:pPr marL="342900" indent="-342900">
-              <a:spcAft>
-                <a:spcPts val="800"/>
-              </a:spcAft>
-              <a:buSzPct val="100000"/>
-              <a:buChar char="•"/>
-            </a:pPr>
-            <a:r>
-              <a:rPr lang="en-US" sz="1400" dirty="0">
-                <a:solidFill>
-                  <a:srgbClr val="403B33"/>
-                </a:solidFill>
-                <a:latin typeface="Calibri" pitchFamily="34" charset="0"/>
-                <a:ea typeface="Calibri" pitchFamily="34" charset="-122"/>
-                <a:cs typeface="Calibri" pitchFamily="34" charset="-120"/>
-              </a:rPr>
-              <a:t>What the doctors already use every day</a:t>
-            </a:r>
-            <a:endParaRPr lang="en-US" sz="1400" dirty="0"/>
-          </a:p>
-        </p:txBody>
-      </p:sp>
-      <p:sp>
-        <p:nvSpPr>
-          <p:cNvPr id="10" name="Shape 8"/>
-          <p:cNvSpPr/>
-          <p:nvPr/>
-        </p:nvSpPr>
-        <p:spPr>
-          <a:xfrm>
-            <a:off x="685800" y="4846320"/>
-            <a:ext cx="10789920" cy="1188720"/>
-          </a:xfrm>
-          <a:prstGeom prst="roundRect">
-            <a:avLst>
-              <a:gd name="adj" fmla="val 6154"/>
-            </a:avLst>
-          </a:prstGeom>
-          <a:solidFill>
-            <a:srgbClr val="052B26"/>
-          </a:solidFill>
-          <a:ln w="12700">
-            <a:solidFill>
-              <a:srgbClr val="052B26"/>
-            </a:solidFill>
-            <a:prstDash val="solid"/>
-          </a:ln>
-        </p:spPr>
-      </p:sp>
-      <p:sp>
-        <p:nvSpPr>
-          <p:cNvPr id="11" name="Text 9"/>
-          <p:cNvSpPr/>
-          <p:nvPr/>
-        </p:nvSpPr>
-        <p:spPr>
-          <a:xfrm>
-            <a:off x="1143000" y="5029200"/>
-            <a:ext cx="9875520" cy="822960"/>
+          <p:cNvPr id="13" name="Text 11"/>
+          <p:cNvSpPr/>
+          <p:nvPr/>
+        </p:nvSpPr>
+        <p:spPr>
+          <a:xfrm>
+            <a:off x="1097280" y="5230368"/>
+            <a:ext cx="9966960" cy="777240"/>
           </a:xfrm>
           <a:prstGeom prst="rect">
             <a:avLst/>
@@ -9100,22 +10929,22 @@
           <a:p>
             <a:pPr algn="ctr" indent="0" marL="0">
               <a:lnSpc>
-                <a:spcPts val="2400"/>
+                <a:spcPts val="2000"/>
               </a:lnSpc>
               <a:buNone/>
             </a:pPr>
             <a:r>
-              <a:rPr lang="en-US" sz="1600" i="1" dirty="0">
-                <a:solidFill>
-                  <a:srgbClr val="FFFFFF"/>
-                </a:solidFill>
-                <a:latin typeface="Cambria" pitchFamily="34" charset="0"/>
-                <a:ea typeface="Cambria" pitchFamily="34" charset="-122"/>
-                <a:cs typeface="Cambria" pitchFamily="34" charset="-120"/>
-              </a:rPr>
-              <a:t>There is deliberately no second place to write a prescription. Two records that can disagree about one patient is a real danger, and avoiding it was worth more than the convenience.</a:t>
-            </a:r>
-            <a:endParaRPr lang="en-US" sz="1600" dirty="0"/>
+              <a:rPr lang="en-US" sz="1300" dirty="0">
+                <a:solidFill>
+                  <a:srgbClr val="403B33"/>
+                </a:solidFill>
+                <a:latin typeface="Calibri" pitchFamily="34" charset="0"/>
+                <a:ea typeface="Calibri" pitchFamily="34" charset="-122"/>
+                <a:cs typeface="Calibri" pitchFamily="34" charset="-120"/>
+              </a:rPr>
+              <a:t>And there is no second machine for the database. It is one file sitting beside the program, so the whole hospital runs on one small computer — most systems need a separate database server, which doubles the bill and adds another thing that can fail at two in the morning.</a:t>
+            </a:r>
+            <a:endParaRPr lang="en-US" sz="1300" dirty="0"/>
           </a:p>
         </p:txBody>
       </p:sp>
